--- a/site/tema6/diapositivas/actividades.pptx
+++ b/site/tema6/diapositivas/actividades.pptx
@@ -4,6 +4,9 @@
   <p:sldMasterIdLst>
     <p:sldMasterId id="2147483648" r:id="rId1"/>
   </p:sldMasterIdLst>
+  <p:notesMasterIdLst>
+    <p:notesMasterId r:id="rId12"/>
+  </p:notesMasterIdLst>
   <p:sldIdLst>
     <p:sldId id="256" r:id="rId2"/>
     <p:sldId id="257" r:id="rId3"/>
@@ -11,10 +14,11 @@
     <p:sldId id="259" r:id="rId5"/>
     <p:sldId id="260" r:id="rId6"/>
     <p:sldId id="261" r:id="rId7"/>
+    <p:sldId id="262" r:id="rId8"/>
+    <p:sldId id="263" r:id="rId9"/>
+    <p:sldId id="264" r:id="rId10"/>
+    <p:sldId id="265" r:id="rId11"/>
   </p:sldIdLst>
-  <p:notesMasterIdLst>
-    <p:notesMasterId r:id="rId8"/>
-  </p:notesMasterIdLst>
   <p:sldSz cx="12192000" cy="6858000"/>
   <p:notesSz cx="6858000" cy="12192000"/>
   <p:defaultTextStyle>
@@ -109,6 +113,11 @@
       </a:defRPr>
     </a:lvl9pPr>
   </p:defaultTextStyle>
+  <p:extLst>
+    <p:ext uri="{EFAFB233-063F-42B5-8137-9DF3F51BA10A}">
+      <p15:sldGuideLst xmlns:p15="http://schemas.microsoft.com/office/powerpoint/2012/main"/>
+    </p:ext>
+  </p:extLst>
 </p:presentation>
 </file>
 
@@ -134,234 +143,10 @@
           <a:chExt cx="0" cy="0"/>
         </a:xfrm>
       </p:grpSpPr>
-      <p:sp>
-        <p:nvSpPr>
-          <p:cNvPr id="2" name="Header Placeholder 1"/>
-          <p:cNvSpPr>
-            <a:spLocks noGrp="1"/>
-          </p:cNvSpPr>
-          <p:nvPr>
-            <p:ph type="hdr" sz="quarter"/>
-          </p:nvPr>
-        </p:nvSpPr>
-        <p:spPr>
-          <a:xfrm>
-            <a:off x="0" y="0"/>
-            <a:ext cx="2971800" cy="458788"/>
-          </a:xfrm>
-          <a:prstGeom prst="rect">
-            <a:avLst/>
-          </a:prstGeom>
-        </p:spPr>
-        <p:txBody>
-          <a:bodyPr vert="horz" lIns="91440" tIns="45720" rIns="91440" bIns="45720" rtlCol="0"/>
-          <a:lstStyle>
-            <a:lvl1pPr algn="l">
-              <a:defRPr sz="1200"/>
-            </a:lvl1pPr>
-          </a:lstStyle>
-          <a:p>
-            <a:endParaRPr lang="en-US"/>
-          </a:p>
-        </p:txBody>
-      </p:sp>
-      <p:sp>
-        <p:nvSpPr>
-          <p:cNvPr id="3" name="Date Placeholder 2"/>
-          <p:cNvSpPr>
-            <a:spLocks noGrp="1"/>
-          </p:cNvSpPr>
-          <p:nvPr>
-            <p:ph type="dt" idx="1"/>
-          </p:nvPr>
-        </p:nvSpPr>
-        <p:spPr>
-          <a:xfrm>
-            <a:off x="3884613" y="0"/>
-            <a:ext cx="2971800" cy="458788"/>
-          </a:xfrm>
-          <a:prstGeom prst="rect">
-            <a:avLst/>
-          </a:prstGeom>
-        </p:spPr>
-        <p:txBody>
-          <a:bodyPr vert="horz" lIns="91440" tIns="45720" rIns="91440" bIns="45720" rtlCol="0"/>
-          <a:lstStyle>
-            <a:lvl1pPr algn="r">
-              <a:defRPr sz="1200"/>
-            </a:lvl1pPr>
-          </a:lstStyle>
-          <a:p>
-            <a:fld id="{5282F153-3F37-0F45-9E97-73ACFA13230C}" type="datetimeFigureOut">
-              <a:rPr lang="en-US"/>
-              <a:t>7/23/19</a:t>
-            </a:fld>
-            <a:endParaRPr lang="en-US"/>
-          </a:p>
-        </p:txBody>
-      </p:sp>
-      <p:sp>
-        <p:nvSpPr>
-          <p:cNvPr id="4" name="Slide Image Placeholder 3"/>
-          <p:cNvSpPr>
-            <a:spLocks noGrp="1" noRot="1" noChangeAspect="1"/>
-          </p:cNvSpPr>
-          <p:nvPr>
-            <p:ph type="sldImg" idx="2"/>
-          </p:nvPr>
-        </p:nvSpPr>
-        <p:spPr>
-          <a:xfrm>
-            <a:off x="685800" y="1143000"/>
-            <a:ext cx="5486400" cy="3086100"/>
-          </a:xfrm>
-          <a:prstGeom prst="rect">
-            <a:avLst/>
-          </a:prstGeom>
-          <a:noFill/>
-          <a:ln w="12700">
-            <a:solidFill>
-              <a:prstClr val="black"/>
-            </a:solidFill>
-          </a:ln>
-        </p:spPr>
-        <p:txBody>
-          <a:bodyPr vert="horz" lIns="91440" tIns="45720" rIns="91440" bIns="45720" rtlCol="0" anchor="ctr"/>
-          <a:lstStyle/>
-          <a:p>
-            <a:endParaRPr lang="en-US"/>
-          </a:p>
-        </p:txBody>
-      </p:sp>
-      <p:sp>
-        <p:nvSpPr>
-          <p:cNvPr id="5" name="Notes Placeholder 4"/>
-          <p:cNvSpPr>
-            <a:spLocks noGrp="1"/>
-          </p:cNvSpPr>
-          <p:nvPr>
-            <p:ph type="body" sz="quarter" idx="3"/>
-          </p:nvPr>
-        </p:nvSpPr>
-        <p:spPr>
-          <a:xfrm>
-            <a:off x="685800" y="4400550"/>
-            <a:ext cx="5486400" cy="3600450"/>
-          </a:xfrm>
-          <a:prstGeom prst="rect">
-            <a:avLst/>
-          </a:prstGeom>
-        </p:spPr>
-        <p:txBody>
-          <a:bodyPr vert="horz" lIns="91440" tIns="45720" rIns="91440" bIns="45720" rtlCol="0"/>
-          <a:lstStyle/>
-          <a:p>
-            <a:pPr lvl="0"/>
-            <a:r>
-              <a:rPr lang="en-US"/>
-              <a:t>Click to edit Master text styles</a:t>
-            </a:r>
-          </a:p>
-          <a:p>
-            <a:pPr lvl="1"/>
-            <a:r>
-              <a:rPr lang="en-US"/>
-              <a:t>Second level</a:t>
-            </a:r>
-          </a:p>
-          <a:p>
-            <a:pPr lvl="2"/>
-            <a:r>
-              <a:rPr lang="en-US"/>
-              <a:t>Third level</a:t>
-            </a:r>
-          </a:p>
-          <a:p>
-            <a:pPr lvl="3"/>
-            <a:r>
-              <a:rPr lang="en-US"/>
-              <a:t>Fourth level</a:t>
-            </a:r>
-          </a:p>
-          <a:p>
-            <a:pPr lvl="4"/>
-            <a:r>
-              <a:rPr lang="en-US"/>
-              <a:t>Fifth level</a:t>
-            </a:r>
-          </a:p>
-        </p:txBody>
-      </p:sp>
-      <p:sp>
-        <p:nvSpPr>
-          <p:cNvPr id="6" name="Footer Placeholder 5"/>
-          <p:cNvSpPr>
-            <a:spLocks noGrp="1"/>
-          </p:cNvSpPr>
-          <p:nvPr>
-            <p:ph type="ftr" sz="quarter" idx="4"/>
-          </p:nvPr>
-        </p:nvSpPr>
-        <p:spPr>
-          <a:xfrm>
-            <a:off x="0" y="8685213"/>
-            <a:ext cx="2971800" cy="458787"/>
-          </a:xfrm>
-          <a:prstGeom prst="rect">
-            <a:avLst/>
-          </a:prstGeom>
-        </p:spPr>
-        <p:txBody>
-          <a:bodyPr vert="horz" lIns="91440" tIns="45720" rIns="91440" bIns="45720" rtlCol="0" anchor="b"/>
-          <a:lstStyle>
-            <a:lvl1pPr algn="l">
-              <a:defRPr sz="1200"/>
-            </a:lvl1pPr>
-          </a:lstStyle>
-          <a:p>
-            <a:endParaRPr lang="en-US"/>
-          </a:p>
-        </p:txBody>
-      </p:sp>
-      <p:sp>
-        <p:nvSpPr>
-          <p:cNvPr id="7" name="Slide Number Placeholder 6"/>
-          <p:cNvSpPr>
-            <a:spLocks noGrp="1"/>
-          </p:cNvSpPr>
-          <p:nvPr>
-            <p:ph type="sldNum" sz="quarter" idx="5"/>
-          </p:nvPr>
-        </p:nvSpPr>
-        <p:spPr>
-          <a:xfrm>
-            <a:off x="3884613" y="8685213"/>
-            <a:ext cx="2971800" cy="458787"/>
-          </a:xfrm>
-          <a:prstGeom prst="rect">
-            <a:avLst/>
-          </a:prstGeom>
-        </p:spPr>
-        <p:txBody>
-          <a:bodyPr vert="horz" lIns="91440" tIns="45720" rIns="91440" bIns="45720" rtlCol="0" anchor="b"/>
-          <a:lstStyle>
-            <a:lvl1pPr algn="r">
-              <a:defRPr sz="1200"/>
-            </a:lvl1pPr>
-          </a:lstStyle>
-          <a:p>
-            <a:fld id="{CE5E9CC1-C706-0F49-92D6-E571CC5EEA8F}" type="slidenum">
-              <a:rPr lang="en-US"/>
-              <a:t>‹#›</a:t>
-            </a:fld>
-            <a:endParaRPr lang="en-US"/>
-          </a:p>
-        </p:txBody>
-      </p:sp>
     </p:spTree>
     <p:extLst>
       <p:ext uri="{BB962C8B-B14F-4D97-AF65-F5344CB8AC3E}">
-        <p14:creationId xmlns:p14="http://schemas.microsoft.com/office/powerpoint/2010/main" val="1024086991"/>
+        <p14:creationId xmlns:p14="http://schemas.microsoft.com/office/powerpoint/2010/main" val="1301767456"/>
       </p:ext>
     </p:extLst>
   </p:cSld>
@@ -505,10 +290,6 @@
           <a:bodyPr/>
           <a:lstStyle/>
           <a:p>
-            <a:r>
-              <a:rPr lang="en-US" dirty="0"/>
-              <a:t/>
-            </a:r>
             <a:endParaRPr lang="en-US" dirty="0"/>
           </a:p>
         </p:txBody>
@@ -531,6 +312,90 @@
             <a:fld id="{F7021451-1387-4CA6-816F-3879F97B5CBC}" type="slidenum">
               <a:rPr lang="en-US"/>
               <a:t>1</a:t>
+            </a:fld>
+            <a:endParaRPr lang="en-US"/>
+          </a:p>
+        </p:txBody>
+      </p:sp>
+    </p:spTree>
+    <p:extLst>
+      <p:ext uri="{BB962C8B-B14F-4D97-AF65-F5344CB8AC3E}">
+        <p14:creationId xmlns:p14="http://schemas.microsoft.com/office/powerpoint/2010/main" val="1024086991"/>
+      </p:ext>
+    </p:extLst>
+  </p:cSld>
+  <p:clrMapOvr>
+    <a:masterClrMapping/>
+  </p:clrMapOvr>
+</p:notes>
+</file>
+
+<file path=ppt/notesSlides/notesSlide10.xml><?xml version="1.0" encoding="utf-8"?>
+<p:notes xmlns:a="http://schemas.openxmlformats.org/drawingml/2006/main" xmlns:r="http://schemas.openxmlformats.org/officeDocument/2006/relationships" xmlns:p="http://schemas.openxmlformats.org/presentationml/2006/main">
+  <p:cSld>
+    <p:spTree>
+      <p:nvGrpSpPr>
+        <p:cNvPr id="1" name=""/>
+        <p:cNvGrpSpPr/>
+        <p:nvPr/>
+      </p:nvGrpSpPr>
+      <p:grpSpPr>
+        <a:xfrm>
+          <a:off x="0" y="0"/>
+          <a:ext cx="0" cy="0"/>
+          <a:chOff x="0" y="0"/>
+          <a:chExt cx="0" cy="0"/>
+        </a:xfrm>
+      </p:grpSpPr>
+      <p:sp>
+        <p:nvSpPr>
+          <p:cNvPr id="2" name="Slide Image Placeholder 1"/>
+          <p:cNvSpPr>
+            <a:spLocks noGrp="1" noRot="1" noChangeAspect="1"/>
+          </p:cNvSpPr>
+          <p:nvPr>
+            <p:ph type="sldImg"/>
+          </p:nvPr>
+        </p:nvSpPr>
+        <p:spPr/>
+      </p:sp>
+      <p:sp>
+        <p:nvSpPr>
+          <p:cNvPr id="3" name="Notes Placeholder 2"/>
+          <p:cNvSpPr>
+            <a:spLocks noGrp="1"/>
+          </p:cNvSpPr>
+          <p:nvPr>
+            <p:ph type="body" idx="1"/>
+          </p:nvPr>
+        </p:nvSpPr>
+        <p:spPr/>
+        <p:txBody>
+          <a:bodyPr/>
+          <a:lstStyle/>
+          <a:p>
+            <a:endParaRPr lang="en-US" dirty="0"/>
+          </a:p>
+        </p:txBody>
+      </p:sp>
+      <p:sp>
+        <p:nvSpPr>
+          <p:cNvPr id="4" name="Slide Number Placeholder 3"/>
+          <p:cNvSpPr>
+            <a:spLocks noGrp="1"/>
+          </p:cNvSpPr>
+          <p:nvPr>
+            <p:ph type="sldNum" sz="quarter" idx="10"/>
+          </p:nvPr>
+        </p:nvSpPr>
+        <p:spPr/>
+        <p:txBody>
+          <a:bodyPr/>
+          <a:lstStyle/>
+          <a:p>
+            <a:fld id="{F7021451-1387-4CA6-816F-3879F97B5CBC}" type="slidenum">
+              <a:rPr lang="en-US"/>
+              <a:t>10</a:t>
             </a:fld>
             <a:endParaRPr lang="en-US"/>
           </a:p>
@@ -593,10 +458,6 @@
           <a:bodyPr/>
           <a:lstStyle/>
           <a:p>
-            <a:r>
-              <a:rPr lang="en-US" dirty="0"/>
-              <a:t/>
-            </a:r>
             <a:endParaRPr lang="en-US" dirty="0"/>
           </a:p>
         </p:txBody>
@@ -681,10 +542,6 @@
           <a:bodyPr/>
           <a:lstStyle/>
           <a:p>
-            <a:r>
-              <a:rPr lang="en-US" dirty="0"/>
-              <a:t/>
-            </a:r>
             <a:endParaRPr lang="en-US" dirty="0"/>
           </a:p>
         </p:txBody>
@@ -769,10 +626,6 @@
           <a:bodyPr/>
           <a:lstStyle/>
           <a:p>
-            <a:r>
-              <a:rPr lang="en-US" dirty="0"/>
-              <a:t/>
-            </a:r>
             <a:endParaRPr lang="en-US" dirty="0"/>
           </a:p>
         </p:txBody>
@@ -857,10 +710,6 @@
           <a:bodyPr/>
           <a:lstStyle/>
           <a:p>
-            <a:r>
-              <a:rPr lang="en-US" dirty="0"/>
-              <a:t/>
-            </a:r>
             <a:endParaRPr lang="en-US" dirty="0"/>
           </a:p>
         </p:txBody>
@@ -945,10 +794,6 @@
           <a:bodyPr/>
           <a:lstStyle/>
           <a:p>
-            <a:r>
-              <a:rPr lang="en-US" dirty="0"/>
-              <a:t/>
-            </a:r>
             <a:endParaRPr lang="en-US" dirty="0"/>
           </a:p>
         </p:txBody>
@@ -971,6 +816,258 @@
             <a:fld id="{F7021451-1387-4CA6-816F-3879F97B5CBC}" type="slidenum">
               <a:rPr lang="en-US"/>
               <a:t>6</a:t>
+            </a:fld>
+            <a:endParaRPr lang="en-US"/>
+          </a:p>
+        </p:txBody>
+      </p:sp>
+    </p:spTree>
+    <p:extLst>
+      <p:ext uri="{BB962C8B-B14F-4D97-AF65-F5344CB8AC3E}">
+        <p14:creationId xmlns:p14="http://schemas.microsoft.com/office/powerpoint/2010/main" val="1024086991"/>
+      </p:ext>
+    </p:extLst>
+  </p:cSld>
+  <p:clrMapOvr>
+    <a:masterClrMapping/>
+  </p:clrMapOvr>
+</p:notes>
+</file>
+
+<file path=ppt/notesSlides/notesSlide7.xml><?xml version="1.0" encoding="utf-8"?>
+<p:notes xmlns:a="http://schemas.openxmlformats.org/drawingml/2006/main" xmlns:r="http://schemas.openxmlformats.org/officeDocument/2006/relationships" xmlns:p="http://schemas.openxmlformats.org/presentationml/2006/main">
+  <p:cSld>
+    <p:spTree>
+      <p:nvGrpSpPr>
+        <p:cNvPr id="1" name=""/>
+        <p:cNvGrpSpPr/>
+        <p:nvPr/>
+      </p:nvGrpSpPr>
+      <p:grpSpPr>
+        <a:xfrm>
+          <a:off x="0" y="0"/>
+          <a:ext cx="0" cy="0"/>
+          <a:chOff x="0" y="0"/>
+          <a:chExt cx="0" cy="0"/>
+        </a:xfrm>
+      </p:grpSpPr>
+      <p:sp>
+        <p:nvSpPr>
+          <p:cNvPr id="2" name="Slide Image Placeholder 1"/>
+          <p:cNvSpPr>
+            <a:spLocks noGrp="1" noRot="1" noChangeAspect="1"/>
+          </p:cNvSpPr>
+          <p:nvPr>
+            <p:ph type="sldImg"/>
+          </p:nvPr>
+        </p:nvSpPr>
+        <p:spPr/>
+      </p:sp>
+      <p:sp>
+        <p:nvSpPr>
+          <p:cNvPr id="3" name="Notes Placeholder 2"/>
+          <p:cNvSpPr>
+            <a:spLocks noGrp="1"/>
+          </p:cNvSpPr>
+          <p:nvPr>
+            <p:ph type="body" idx="1"/>
+          </p:nvPr>
+        </p:nvSpPr>
+        <p:spPr/>
+        <p:txBody>
+          <a:bodyPr/>
+          <a:lstStyle/>
+          <a:p>
+            <a:endParaRPr lang="en-US" dirty="0"/>
+          </a:p>
+        </p:txBody>
+      </p:sp>
+      <p:sp>
+        <p:nvSpPr>
+          <p:cNvPr id="4" name="Slide Number Placeholder 3"/>
+          <p:cNvSpPr>
+            <a:spLocks noGrp="1"/>
+          </p:cNvSpPr>
+          <p:nvPr>
+            <p:ph type="sldNum" sz="quarter" idx="10"/>
+          </p:nvPr>
+        </p:nvSpPr>
+        <p:spPr/>
+        <p:txBody>
+          <a:bodyPr/>
+          <a:lstStyle/>
+          <a:p>
+            <a:fld id="{F7021451-1387-4CA6-816F-3879F97B5CBC}" type="slidenum">
+              <a:rPr lang="en-US"/>
+              <a:t>7</a:t>
+            </a:fld>
+            <a:endParaRPr lang="en-US"/>
+          </a:p>
+        </p:txBody>
+      </p:sp>
+    </p:spTree>
+    <p:extLst>
+      <p:ext uri="{BB962C8B-B14F-4D97-AF65-F5344CB8AC3E}">
+        <p14:creationId xmlns:p14="http://schemas.microsoft.com/office/powerpoint/2010/main" val="1024086991"/>
+      </p:ext>
+    </p:extLst>
+  </p:cSld>
+  <p:clrMapOvr>
+    <a:masterClrMapping/>
+  </p:clrMapOvr>
+</p:notes>
+</file>
+
+<file path=ppt/notesSlides/notesSlide8.xml><?xml version="1.0" encoding="utf-8"?>
+<p:notes xmlns:a="http://schemas.openxmlformats.org/drawingml/2006/main" xmlns:r="http://schemas.openxmlformats.org/officeDocument/2006/relationships" xmlns:p="http://schemas.openxmlformats.org/presentationml/2006/main">
+  <p:cSld>
+    <p:spTree>
+      <p:nvGrpSpPr>
+        <p:cNvPr id="1" name=""/>
+        <p:cNvGrpSpPr/>
+        <p:nvPr/>
+      </p:nvGrpSpPr>
+      <p:grpSpPr>
+        <a:xfrm>
+          <a:off x="0" y="0"/>
+          <a:ext cx="0" cy="0"/>
+          <a:chOff x="0" y="0"/>
+          <a:chExt cx="0" cy="0"/>
+        </a:xfrm>
+      </p:grpSpPr>
+      <p:sp>
+        <p:nvSpPr>
+          <p:cNvPr id="2" name="Slide Image Placeholder 1"/>
+          <p:cNvSpPr>
+            <a:spLocks noGrp="1" noRot="1" noChangeAspect="1"/>
+          </p:cNvSpPr>
+          <p:nvPr>
+            <p:ph type="sldImg"/>
+          </p:nvPr>
+        </p:nvSpPr>
+        <p:spPr/>
+      </p:sp>
+      <p:sp>
+        <p:nvSpPr>
+          <p:cNvPr id="3" name="Notes Placeholder 2"/>
+          <p:cNvSpPr>
+            <a:spLocks noGrp="1"/>
+          </p:cNvSpPr>
+          <p:nvPr>
+            <p:ph type="body" idx="1"/>
+          </p:nvPr>
+        </p:nvSpPr>
+        <p:spPr/>
+        <p:txBody>
+          <a:bodyPr/>
+          <a:lstStyle/>
+          <a:p>
+            <a:endParaRPr lang="en-US" dirty="0"/>
+          </a:p>
+        </p:txBody>
+      </p:sp>
+      <p:sp>
+        <p:nvSpPr>
+          <p:cNvPr id="4" name="Slide Number Placeholder 3"/>
+          <p:cNvSpPr>
+            <a:spLocks noGrp="1"/>
+          </p:cNvSpPr>
+          <p:nvPr>
+            <p:ph type="sldNum" sz="quarter" idx="10"/>
+          </p:nvPr>
+        </p:nvSpPr>
+        <p:spPr/>
+        <p:txBody>
+          <a:bodyPr/>
+          <a:lstStyle/>
+          <a:p>
+            <a:fld id="{F7021451-1387-4CA6-816F-3879F97B5CBC}" type="slidenum">
+              <a:rPr lang="en-US"/>
+              <a:t>8</a:t>
+            </a:fld>
+            <a:endParaRPr lang="en-US"/>
+          </a:p>
+        </p:txBody>
+      </p:sp>
+    </p:spTree>
+    <p:extLst>
+      <p:ext uri="{BB962C8B-B14F-4D97-AF65-F5344CB8AC3E}">
+        <p14:creationId xmlns:p14="http://schemas.microsoft.com/office/powerpoint/2010/main" val="1024086991"/>
+      </p:ext>
+    </p:extLst>
+  </p:cSld>
+  <p:clrMapOvr>
+    <a:masterClrMapping/>
+  </p:clrMapOvr>
+</p:notes>
+</file>
+
+<file path=ppt/notesSlides/notesSlide9.xml><?xml version="1.0" encoding="utf-8"?>
+<p:notes xmlns:a="http://schemas.openxmlformats.org/drawingml/2006/main" xmlns:r="http://schemas.openxmlformats.org/officeDocument/2006/relationships" xmlns:p="http://schemas.openxmlformats.org/presentationml/2006/main">
+  <p:cSld>
+    <p:spTree>
+      <p:nvGrpSpPr>
+        <p:cNvPr id="1" name=""/>
+        <p:cNvGrpSpPr/>
+        <p:nvPr/>
+      </p:nvGrpSpPr>
+      <p:grpSpPr>
+        <a:xfrm>
+          <a:off x="0" y="0"/>
+          <a:ext cx="0" cy="0"/>
+          <a:chOff x="0" y="0"/>
+          <a:chExt cx="0" cy="0"/>
+        </a:xfrm>
+      </p:grpSpPr>
+      <p:sp>
+        <p:nvSpPr>
+          <p:cNvPr id="2" name="Slide Image Placeholder 1"/>
+          <p:cNvSpPr>
+            <a:spLocks noGrp="1" noRot="1" noChangeAspect="1"/>
+          </p:cNvSpPr>
+          <p:nvPr>
+            <p:ph type="sldImg"/>
+          </p:nvPr>
+        </p:nvSpPr>
+        <p:spPr/>
+      </p:sp>
+      <p:sp>
+        <p:nvSpPr>
+          <p:cNvPr id="3" name="Notes Placeholder 2"/>
+          <p:cNvSpPr>
+            <a:spLocks noGrp="1"/>
+          </p:cNvSpPr>
+          <p:nvPr>
+            <p:ph type="body" idx="1"/>
+          </p:nvPr>
+        </p:nvSpPr>
+        <p:spPr/>
+        <p:txBody>
+          <a:bodyPr/>
+          <a:lstStyle/>
+          <a:p>
+            <a:endParaRPr lang="en-US" dirty="0"/>
+          </a:p>
+        </p:txBody>
+      </p:sp>
+      <p:sp>
+        <p:nvSpPr>
+          <p:cNvPr id="4" name="Slide Number Placeholder 3"/>
+          <p:cNvSpPr>
+            <a:spLocks noGrp="1"/>
+          </p:cNvSpPr>
+          <p:nvPr>
+            <p:ph type="sldNum" sz="quarter" idx="10"/>
+          </p:nvPr>
+        </p:nvSpPr>
+        <p:spPr/>
+        <p:txBody>
+          <a:bodyPr/>
+          <a:lstStyle/>
+          <a:p>
+            <a:fld id="{F7021451-1387-4CA6-816F-3879F97B5CBC}" type="slidenum">
+              <a:rPr lang="en-US"/>
+              <a:t>9</a:t>
             </a:fld>
             <a:endParaRPr lang="en-US"/>
           </a:p>
@@ -1022,6 +1119,11 @@
 <file path=ppt/slideMasters/slideMaster1.xml><?xml version="1.0" encoding="utf-8"?>
 <p:sldMaster xmlns:a="http://schemas.openxmlformats.org/drawingml/2006/main" xmlns:r="http://schemas.openxmlformats.org/officeDocument/2006/relationships" xmlns:p="http://schemas.openxmlformats.org/presentationml/2006/main">
   <p:cSld>
+    <p:bg>
+      <p:bgRef idx="1001">
+        <a:schemeClr val="bg1"/>
+      </p:bgRef>
+    </p:bg>
     <p:spTree>
       <p:nvGrpSpPr>
         <p:cNvPr id="1" name=""/>
@@ -1304,6 +1406,7 @@
         <a:solidFill>
           <a:srgbClr val="303F9F"/>
         </a:solidFill>
+        <a:effectLst/>
       </p:bgPr>
     </p:bg>
     <p:spTree>
@@ -1341,7 +1444,7 @@
           <a:bodyPr wrap="square" rtlCol="0" anchor="ctr"/>
           <a:lstStyle/>
           <a:p>
-            <a:pPr indent="0" marL="0">
+            <a:pPr marL="0" indent="0">
               <a:buNone/>
             </a:pPr>
             <a:r>
@@ -1380,7 +1483,7 @@
           <a:bodyPr wrap="square" rtlCol="0" anchor="ctr"/>
           <a:lstStyle/>
           <a:p>
-            <a:pPr algn="l" indent="0" marL="0">
+            <a:pPr marL="0" indent="0" algn="l">
               <a:buNone/>
             </a:pPr>
             <a:r>
@@ -1422,6 +1525,13 @@
             <a:prstDash val="solid"/>
           </a:ln>
         </p:spPr>
+        <p:txBody>
+          <a:bodyPr/>
+          <a:lstStyle/>
+          <a:p>
+            <a:endParaRPr lang="es-ES"/>
+          </a:p>
+        </p:txBody>
       </p:sp>
       <p:sp>
         <p:nvSpPr>
@@ -1444,7 +1554,7 @@
           <a:bodyPr wrap="square" rtlCol="0" anchor="ctr"/>
           <a:lstStyle/>
           <a:p>
-            <a:pPr indent="0" marL="0">
+            <a:pPr marL="0" indent="0">
               <a:buNone/>
             </a:pPr>
             <a:r>
@@ -1459,6 +1569,287 @@
               <a:t>Flujos, decisiones y concurrencia</a:t>
             </a:r>
             <a:endParaRPr lang="en-US" sz="2000" dirty="0"/>
+          </a:p>
+        </p:txBody>
+      </p:sp>
+    </p:spTree>
+  </p:cSld>
+  <p:clrMapOvr>
+    <a:masterClrMapping/>
+  </p:clrMapOvr>
+</p:sld>
+</file>
+
+<file path=ppt/slides/slide10.xml><?xml version="1.0" encoding="utf-8"?>
+<p:sld xmlns:a="http://schemas.openxmlformats.org/drawingml/2006/main" xmlns:r="http://schemas.openxmlformats.org/officeDocument/2006/relationships" xmlns:p="http://schemas.openxmlformats.org/presentationml/2006/main">
+  <p:cSld name="Slide 10">
+    <p:spTree>
+      <p:nvGrpSpPr>
+        <p:cNvPr id="1" name=""/>
+        <p:cNvGrpSpPr/>
+        <p:nvPr/>
+      </p:nvGrpSpPr>
+      <p:grpSpPr>
+        <a:xfrm>
+          <a:off x="0" y="0"/>
+          <a:ext cx="0" cy="0"/>
+          <a:chOff x="0" y="0"/>
+          <a:chExt cx="0" cy="0"/>
+        </a:xfrm>
+      </p:grpSpPr>
+      <p:sp>
+        <p:nvSpPr>
+          <p:cNvPr id="2" name="Shape 0"/>
+          <p:cNvSpPr/>
+          <p:nvPr/>
+        </p:nvSpPr>
+        <p:spPr>
+          <a:xfrm>
+            <a:off x="0" y="0"/>
+            <a:ext cx="12188952" cy="777240"/>
+          </a:xfrm>
+          <a:prstGeom prst="rect">
+            <a:avLst/>
+          </a:prstGeom>
+          <a:solidFill>
+            <a:srgbClr val="303F9F"/>
+          </a:solidFill>
+          <a:ln w="12700">
+            <a:solidFill>
+              <a:srgbClr val="303F9F"/>
+            </a:solidFill>
+            <a:prstDash val="solid"/>
+          </a:ln>
+        </p:spPr>
+        <p:txBody>
+          <a:bodyPr/>
+          <a:lstStyle/>
+          <a:p>
+            <a:endParaRPr lang="es-ES"/>
+          </a:p>
+        </p:txBody>
+      </p:sp>
+      <p:sp>
+        <p:nvSpPr>
+          <p:cNvPr id="3" name="Text 1"/>
+          <p:cNvSpPr/>
+          <p:nvPr/>
+        </p:nvSpPr>
+        <p:spPr>
+          <a:xfrm>
+            <a:off x="365760" y="0"/>
+            <a:ext cx="11457432" cy="777240"/>
+          </a:xfrm>
+          <a:prstGeom prst="rect">
+            <a:avLst/>
+          </a:prstGeom>
+          <a:noFill/>
+          <a:ln/>
+        </p:spPr>
+        <p:txBody>
+          <a:bodyPr wrap="square" rtlCol="0" anchor="ctr"/>
+          <a:lstStyle/>
+          <a:p>
+            <a:pPr marL="0" indent="0">
+              <a:buNone/>
+            </a:pPr>
+            <a:r>
+              <a:rPr lang="en-US" sz="2300" b="1" dirty="0">
+                <a:solidFill>
+                  <a:srgbClr val="FFFFFF"/>
+                </a:solidFill>
+                <a:latin typeface="Arial" pitchFamily="34" charset="0"/>
+                <a:ea typeface="Arial" pitchFamily="34" charset="-122"/>
+                <a:cs typeface="Arial" pitchFamily="34" charset="-120"/>
+              </a:rPr>
+              <a:t>Ejemplo leído paso a paso: máquina de café</a:t>
+            </a:r>
+            <a:endParaRPr lang="en-US" sz="2300" dirty="0"/>
+          </a:p>
+        </p:txBody>
+      </p:sp>
+      <p:pic>
+        <p:nvPicPr>
+          <p:cNvPr id="4" name="Image 0" descr="C:/Users/Aitor/Documents/apuntes-profe/entornos-de-desarrollo/docs/tema6/img/actividad-cafe-completo.png"/>
+          <p:cNvPicPr>
+            <a:picLocks noChangeAspect="1"/>
+          </p:cNvPicPr>
+          <p:nvPr/>
+        </p:nvPicPr>
+        <p:blipFill>
+          <a:blip r:embed="rId3"/>
+          <a:stretch>
+            <a:fillRect/>
+          </a:stretch>
+        </p:blipFill>
+        <p:spPr>
+          <a:xfrm>
+            <a:off x="457200" y="1005840"/>
+            <a:ext cx="6035040" cy="4434840"/>
+          </a:xfrm>
+          <a:prstGeom prst="rect">
+            <a:avLst/>
+          </a:prstGeom>
+        </p:spPr>
+      </p:pic>
+      <p:sp>
+        <p:nvSpPr>
+          <p:cNvPr id="5" name="Text 2"/>
+          <p:cNvSpPr/>
+          <p:nvPr/>
+        </p:nvSpPr>
+        <p:spPr>
+          <a:xfrm>
+            <a:off x="6766560" y="1097280"/>
+            <a:ext cx="4937760" cy="4206240"/>
+          </a:xfrm>
+          <a:prstGeom prst="rect">
+            <a:avLst/>
+          </a:prstGeom>
+          <a:noFill/>
+          <a:ln/>
+        </p:spPr>
+        <p:txBody>
+          <a:bodyPr wrap="square" rtlCol="0" anchor="t"/>
+          <a:lstStyle/>
+          <a:p>
+            <a:pPr marL="0" indent="0">
+              <a:spcAft>
+                <a:spcPts val="800"/>
+              </a:spcAft>
+              <a:buNone/>
+            </a:pPr>
+            <a:r>
+              <a:rPr lang="en-US" sz="1300" dirty="0">
+                <a:solidFill>
+                  <a:srgbClr val="212121"/>
+                </a:solidFill>
+                <a:latin typeface="Arial" pitchFamily="34" charset="0"/>
+                <a:ea typeface="Arial" pitchFamily="34" charset="-122"/>
+                <a:cs typeface="Arial" pitchFamily="34" charset="-120"/>
+              </a:rPr>
+              <a:t>•  1. Elegir bebida e Introducir monedas: secuencia normal.</a:t>
+            </a:r>
+            <a:endParaRPr lang="en-US" sz="1300" dirty="0"/>
+          </a:p>
+          <a:p>
+            <a:pPr marL="0" indent="0">
+              <a:spcAft>
+                <a:spcPts val="800"/>
+              </a:spcAft>
+              <a:buNone/>
+            </a:pPr>
+            <a:r>
+              <a:rPr lang="en-US" sz="1300" dirty="0">
+                <a:solidFill>
+                  <a:srgbClr val="212121"/>
+                </a:solidFill>
+                <a:latin typeface="Arial" pitchFamily="34" charset="0"/>
+                <a:ea typeface="Arial" pitchFamily="34" charset="-122"/>
+                <a:cs typeface="Arial" pitchFamily="34" charset="-120"/>
+              </a:rPr>
+              <a:t>•  2. La primera barra abre TRES ramas a la vez: mensaje "Sirviendo café", preparar la bebida y devolver el cambio.</a:t>
+            </a:r>
+            <a:endParaRPr lang="en-US" sz="1300" dirty="0"/>
+          </a:p>
+          <a:p>
+            <a:pPr marL="0" indent="0">
+              <a:spcAft>
+                <a:spcPts val="800"/>
+              </a:spcAft>
+              <a:buNone/>
+            </a:pPr>
+            <a:r>
+              <a:rPr lang="en-US" sz="1300" dirty="0">
+                <a:solidFill>
+                  <a:srgbClr val="212121"/>
+                </a:solidFill>
+                <a:latin typeface="Arial" pitchFamily="34" charset="0"/>
+                <a:ea typeface="Arial" pitchFamily="34" charset="-122"/>
+                <a:cs typeface="Arial" pitchFamily="34" charset="-120"/>
+              </a:rPr>
+              <a:t>•  3. La rama central pasa por un rombo con guardas excluyentes: [café], [capuchino] o [cortado] deciden qué se sirve.</a:t>
+            </a:r>
+            <a:endParaRPr lang="en-US" sz="1300" dirty="0"/>
+          </a:p>
+          <a:p>
+            <a:pPr marL="0" indent="0">
+              <a:spcAft>
+                <a:spcPts val="800"/>
+              </a:spcAft>
+              <a:buNone/>
+            </a:pPr>
+            <a:r>
+              <a:rPr lang="en-US" sz="1300" dirty="0">
+                <a:solidFill>
+                  <a:srgbClr val="212121"/>
+                </a:solidFill>
+                <a:latin typeface="Arial" pitchFamily="34" charset="0"/>
+                <a:ea typeface="Arial" pitchFamily="34" charset="-122"/>
+                <a:cs typeface="Arial" pitchFamily="34" charset="-120"/>
+              </a:rPr>
+              <a:t>•  4. Un segundo rombo reagrupa los tres caminos.</a:t>
+            </a:r>
+            <a:endParaRPr lang="en-US" sz="1300" dirty="0"/>
+          </a:p>
+          <a:p>
+            <a:pPr marL="0" indent="0">
+              <a:spcAft>
+                <a:spcPts val="800"/>
+              </a:spcAft>
+              <a:buNone/>
+            </a:pPr>
+            <a:r>
+              <a:rPr lang="en-US" sz="1300" dirty="0">
+                <a:solidFill>
+                  <a:srgbClr val="212121"/>
+                </a:solidFill>
+                <a:latin typeface="Arial" pitchFamily="34" charset="0"/>
+                <a:ea typeface="Arial" pitchFamily="34" charset="-122"/>
+                <a:cs typeface="Arial" pitchFamily="34" charset="-120"/>
+              </a:rPr>
+              <a:t>•  5. El join espera a que las tres ramas acaben; solo entonces "Recoja su café" y nodo final.</a:t>
+            </a:r>
+            <a:endParaRPr lang="en-US" sz="1300" dirty="0"/>
+          </a:p>
+        </p:txBody>
+      </p:sp>
+      <p:sp>
+        <p:nvSpPr>
+          <p:cNvPr id="6" name="Text 3"/>
+          <p:cNvSpPr/>
+          <p:nvPr/>
+        </p:nvSpPr>
+        <p:spPr>
+          <a:xfrm>
+            <a:off x="548640" y="6473952"/>
+            <a:ext cx="11091672" cy="292608"/>
+          </a:xfrm>
+          <a:prstGeom prst="rect">
+            <a:avLst/>
+          </a:prstGeom>
+          <a:noFill/>
+          <a:ln/>
+        </p:spPr>
+        <p:txBody>
+          <a:bodyPr wrap="square" rtlCol="0" anchor="ctr"/>
+          <a:lstStyle/>
+          <a:p>
+            <a:pPr marL="0" indent="0" algn="r">
+              <a:buNone/>
+            </a:pPr>
+            <a:r>
+              <a:rPr lang="en-US" sz="1100" dirty="0">
+                <a:solidFill>
+                  <a:srgbClr val="757575"/>
+                </a:solidFill>
+                <a:latin typeface="Arial" pitchFamily="34" charset="0"/>
+                <a:ea typeface="Arial" pitchFamily="34" charset="-122"/>
+                <a:cs typeface="Arial" pitchFamily="34" charset="-120"/>
+              </a:rPr>
+              <a:t>Entornos de Desarrollo — Tema 6 · Diagrama de actividades</a:t>
+            </a:r>
+            <a:endParaRPr lang="en-US" sz="1100" dirty="0"/>
           </a:p>
         </p:txBody>
       </p:sp>
@@ -1511,6 +1902,13 @@
             <a:prstDash val="solid"/>
           </a:ln>
         </p:spPr>
+        <p:txBody>
+          <a:bodyPr/>
+          <a:lstStyle/>
+          <a:p>
+            <a:endParaRPr lang="es-ES"/>
+          </a:p>
+        </p:txBody>
       </p:sp>
       <p:sp>
         <p:nvSpPr>
@@ -1533,7 +1931,7 @@
           <a:bodyPr wrap="square" rtlCol="0" anchor="ctr"/>
           <a:lstStyle/>
           <a:p>
-            <a:pPr indent="0" marL="0">
+            <a:pPr marL="0" indent="0">
               <a:buNone/>
             </a:pPr>
             <a:r>
@@ -1575,6 +1973,13 @@
             <a:prstDash val="solid"/>
           </a:ln>
         </p:spPr>
+        <p:txBody>
+          <a:bodyPr/>
+          <a:lstStyle/>
+          <a:p>
+            <a:endParaRPr lang="es-ES"/>
+          </a:p>
+        </p:txBody>
       </p:sp>
       <p:sp>
         <p:nvSpPr>
@@ -1597,7 +2002,7 @@
           <a:bodyPr wrap="square" rtlCol="0" anchor="ctr"/>
           <a:lstStyle/>
           <a:p>
-            <a:pPr indent="0" marL="0">
+            <a:pPr marL="0" indent="0">
               <a:buNone/>
             </a:pPr>
             <a:r>
@@ -1636,7 +2041,7 @@
           <a:bodyPr wrap="square" rtlCol="0" anchor="t"/>
           <a:lstStyle/>
           <a:p>
-            <a:pPr indent="0" marL="0">
+            <a:pPr marL="0" indent="0">
               <a:spcAft>
                 <a:spcPts val="800"/>
               </a:spcAft>
@@ -1656,7 +2061,7 @@
             <a:endParaRPr lang="en-US" sz="1600" dirty="0"/>
           </a:p>
           <a:p>
-            <a:pPr indent="0" marL="0">
+            <a:pPr marL="0" indent="0">
               <a:spcAft>
                 <a:spcPts val="800"/>
               </a:spcAft>
@@ -1676,7 +2081,7 @@
             <a:endParaRPr lang="en-US" sz="1600" dirty="0"/>
           </a:p>
           <a:p>
-            <a:pPr indent="0" marL="0">
+            <a:pPr marL="0" indent="0">
               <a:spcAft>
                 <a:spcPts val="800"/>
               </a:spcAft>
@@ -1696,7 +2101,7 @@
             <a:endParaRPr lang="en-US" sz="1600" dirty="0"/>
           </a:p>
           <a:p>
-            <a:pPr indent="0" marL="0">
+            <a:pPr marL="0" indent="0">
               <a:spcAft>
                 <a:spcPts val="800"/>
               </a:spcAft>
@@ -1716,7 +2121,7 @@
             <a:endParaRPr lang="en-US" sz="1600" dirty="0"/>
           </a:p>
           <a:p>
-            <a:pPr indent="0" marL="0">
+            <a:pPr marL="0" indent="0">
               <a:spcAft>
                 <a:spcPts val="800"/>
               </a:spcAft>
@@ -1758,7 +2163,7 @@
           <a:bodyPr wrap="square" rtlCol="0" anchor="ctr"/>
           <a:lstStyle/>
           <a:p>
-            <a:pPr algn="r" indent="0" marL="0">
+            <a:pPr marL="0" indent="0" algn="r">
               <a:buNone/>
             </a:pPr>
             <a:r>
@@ -1825,6 +2230,13 @@
             <a:prstDash val="solid"/>
           </a:ln>
         </p:spPr>
+        <p:txBody>
+          <a:bodyPr/>
+          <a:lstStyle/>
+          <a:p>
+            <a:endParaRPr lang="es-ES"/>
+          </a:p>
+        </p:txBody>
       </p:sp>
       <p:sp>
         <p:nvSpPr>
@@ -1847,7 +2259,7 @@
           <a:bodyPr wrap="square" rtlCol="0" anchor="ctr"/>
           <a:lstStyle/>
           <a:p>
-            <a:pPr indent="0" marL="0">
+            <a:pPr marL="0" indent="0">
               <a:buNone/>
             </a:pPr>
             <a:r>
@@ -1889,6 +2301,13 @@
             <a:prstDash val="solid"/>
           </a:ln>
         </p:spPr>
+        <p:txBody>
+          <a:bodyPr/>
+          <a:lstStyle/>
+          <a:p>
+            <a:endParaRPr lang="es-ES"/>
+          </a:p>
+        </p:txBody>
       </p:sp>
       <p:sp>
         <p:nvSpPr>
@@ -1913,6 +2332,13 @@
             <a:tailEnd type="triangle"/>
           </a:ln>
         </p:spPr>
+        <p:txBody>
+          <a:bodyPr/>
+          <a:lstStyle/>
+          <a:p>
+            <a:endParaRPr lang="es-ES"/>
+          </a:p>
+        </p:txBody>
       </p:sp>
       <p:sp>
         <p:nvSpPr>
@@ -1938,6 +2364,13 @@
             <a:prstDash val="solid"/>
           </a:ln>
         </p:spPr>
+        <p:txBody>
+          <a:bodyPr/>
+          <a:lstStyle/>
+          <a:p>
+            <a:endParaRPr lang="es-ES"/>
+          </a:p>
+        </p:txBody>
       </p:sp>
       <p:sp>
         <p:nvSpPr>
@@ -1960,7 +2393,7 @@
           <a:bodyPr wrap="square" rtlCol="0" anchor="ctr"/>
           <a:lstStyle/>
           <a:p>
-            <a:pPr algn="ctr" indent="0" marL="0">
+            <a:pPr marL="0" indent="0" algn="ctr">
               <a:buNone/>
             </a:pPr>
             <a:r>
@@ -2001,6 +2434,13 @@
             <a:tailEnd type="triangle"/>
           </a:ln>
         </p:spPr>
+        <p:txBody>
+          <a:bodyPr/>
+          <a:lstStyle/>
+          <a:p>
+            <a:endParaRPr lang="es-ES"/>
+          </a:p>
+        </p:txBody>
       </p:sp>
       <p:sp>
         <p:nvSpPr>
@@ -2026,6 +2466,13 @@
             <a:prstDash val="solid"/>
           </a:ln>
         </p:spPr>
+        <p:txBody>
+          <a:bodyPr/>
+          <a:lstStyle/>
+          <a:p>
+            <a:endParaRPr lang="es-ES"/>
+          </a:p>
+        </p:txBody>
       </p:sp>
       <p:sp>
         <p:nvSpPr>
@@ -2048,7 +2495,7 @@
           <a:bodyPr wrap="square" rtlCol="0" anchor="ctr"/>
           <a:lstStyle/>
           <a:p>
-            <a:pPr algn="ctr" indent="0" marL="0">
+            <a:pPr marL="0" indent="0" algn="ctr">
               <a:buNone/>
             </a:pPr>
             <a:r>
@@ -2089,6 +2536,13 @@
             <a:tailEnd type="triangle"/>
           </a:ln>
         </p:spPr>
+        <p:txBody>
+          <a:bodyPr/>
+          <a:lstStyle/>
+          <a:p>
+            <a:endParaRPr lang="es-ES"/>
+          </a:p>
+        </p:txBody>
       </p:sp>
       <p:sp>
         <p:nvSpPr>
@@ -2111,7 +2565,7 @@
           <a:bodyPr wrap="square" rtlCol="0" anchor="ctr"/>
           <a:lstStyle/>
           <a:p>
-            <a:pPr algn="ctr" indent="0" marL="0">
+            <a:pPr marL="0" indent="0" algn="ctr">
               <a:buNone/>
             </a:pPr>
             <a:r>
@@ -2153,6 +2607,13 @@
             <a:prstDash val="solid"/>
           </a:ln>
         </p:spPr>
+        <p:txBody>
+          <a:bodyPr/>
+          <a:lstStyle/>
+          <a:p>
+            <a:endParaRPr lang="es-ES"/>
+          </a:p>
+        </p:txBody>
       </p:sp>
       <p:sp>
         <p:nvSpPr>
@@ -2175,7 +2636,7 @@
           <a:bodyPr wrap="square" rtlCol="0" anchor="ctr"/>
           <a:lstStyle/>
           <a:p>
-            <a:pPr algn="ctr" indent="0" marL="0">
+            <a:pPr marL="0" indent="0" algn="ctr">
               <a:buNone/>
             </a:pPr>
             <a:r>
@@ -2216,6 +2677,13 @@
             <a:tailEnd type="triangle"/>
           </a:ln>
         </p:spPr>
+        <p:txBody>
+          <a:bodyPr/>
+          <a:lstStyle/>
+          <a:p>
+            <a:endParaRPr lang="es-ES"/>
+          </a:p>
+        </p:txBody>
       </p:sp>
       <p:sp>
         <p:nvSpPr>
@@ -2241,6 +2709,13 @@
             <a:prstDash val="solid"/>
           </a:ln>
         </p:spPr>
+        <p:txBody>
+          <a:bodyPr/>
+          <a:lstStyle/>
+          <a:p>
+            <a:endParaRPr lang="es-ES"/>
+          </a:p>
+        </p:txBody>
       </p:sp>
       <p:sp>
         <p:nvSpPr>
@@ -2263,7 +2738,7 @@
           <a:bodyPr wrap="square" rtlCol="0" anchor="ctr"/>
           <a:lstStyle/>
           <a:p>
-            <a:pPr algn="ctr" indent="0" marL="0">
+            <a:pPr marL="0" indent="0" algn="ctr">
               <a:buNone/>
             </a:pPr>
             <a:r>
@@ -2304,6 +2779,13 @@
             <a:tailEnd type="triangle"/>
           </a:ln>
         </p:spPr>
+        <p:txBody>
+          <a:bodyPr/>
+          <a:lstStyle/>
+          <a:p>
+            <a:endParaRPr lang="es-ES"/>
+          </a:p>
+        </p:txBody>
       </p:sp>
       <p:sp>
         <p:nvSpPr>
@@ -2329,6 +2811,13 @@
             <a:prstDash val="solid"/>
           </a:ln>
         </p:spPr>
+        <p:txBody>
+          <a:bodyPr/>
+          <a:lstStyle/>
+          <a:p>
+            <a:endParaRPr lang="es-ES"/>
+          </a:p>
+        </p:txBody>
       </p:sp>
       <p:sp>
         <p:nvSpPr>
@@ -2354,6 +2843,13 @@
             <a:prstDash val="solid"/>
           </a:ln>
         </p:spPr>
+        <p:txBody>
+          <a:bodyPr/>
+          <a:lstStyle/>
+          <a:p>
+            <a:endParaRPr lang="es-ES"/>
+          </a:p>
+        </p:txBody>
       </p:sp>
       <p:sp>
         <p:nvSpPr>
@@ -2378,6 +2874,13 @@
             <a:tailEnd type="triangle"/>
           </a:ln>
         </p:spPr>
+        <p:txBody>
+          <a:bodyPr/>
+          <a:lstStyle/>
+          <a:p>
+            <a:endParaRPr lang="es-ES"/>
+          </a:p>
+        </p:txBody>
       </p:sp>
       <p:sp>
         <p:nvSpPr>
@@ -2400,7 +2903,7 @@
           <a:bodyPr wrap="square" rtlCol="0" anchor="ctr"/>
           <a:lstStyle/>
           <a:p>
-            <a:pPr algn="ctr" indent="0" marL="0">
+            <a:pPr marL="0" indent="0" algn="ctr">
               <a:buNone/>
             </a:pPr>
             <a:r>
@@ -2440,6 +2943,13 @@
             <a:prstDash val="solid"/>
           </a:ln>
         </p:spPr>
+        <p:txBody>
+          <a:bodyPr/>
+          <a:lstStyle/>
+          <a:p>
+            <a:endParaRPr lang="es-ES"/>
+          </a:p>
+        </p:txBody>
       </p:sp>
       <p:sp>
         <p:nvSpPr>
@@ -2464,6 +2974,13 @@
             <a:tailEnd type="triangle"/>
           </a:ln>
         </p:spPr>
+        <p:txBody>
+          <a:bodyPr/>
+          <a:lstStyle/>
+          <a:p>
+            <a:endParaRPr lang="es-ES"/>
+          </a:p>
+        </p:txBody>
       </p:sp>
       <p:sp>
         <p:nvSpPr>
@@ -2488,6 +3005,13 @@
             <a:tailEnd type="triangle"/>
           </a:ln>
         </p:spPr>
+        <p:txBody>
+          <a:bodyPr/>
+          <a:lstStyle/>
+          <a:p>
+            <a:endParaRPr lang="es-ES"/>
+          </a:p>
+        </p:txBody>
       </p:sp>
       <p:sp>
         <p:nvSpPr>
@@ -2510,7 +3034,7 @@
           <a:bodyPr wrap="square" rtlCol="0" anchor="ctr"/>
           <a:lstStyle/>
           <a:p>
-            <a:pPr algn="ctr" indent="0" marL="0">
+            <a:pPr marL="0" indent="0" algn="ctr">
               <a:buNone/>
             </a:pPr>
             <a:r>
@@ -2552,6 +3076,13 @@
             <a:prstDash val="solid"/>
           </a:ln>
         </p:spPr>
+        <p:txBody>
+          <a:bodyPr/>
+          <a:lstStyle/>
+          <a:p>
+            <a:endParaRPr lang="es-ES"/>
+          </a:p>
+        </p:txBody>
       </p:sp>
       <p:sp>
         <p:nvSpPr>
@@ -2574,7 +3105,7 @@
           <a:bodyPr wrap="square" rtlCol="0" anchor="ctr"/>
           <a:lstStyle/>
           <a:p>
-            <a:pPr algn="ctr" indent="0" marL="0">
+            <a:pPr marL="0" indent="0" algn="ctr">
               <a:buNone/>
             </a:pPr>
             <a:r>
@@ -2615,6 +3146,13 @@
             <a:tailEnd type="triangle"/>
           </a:ln>
         </p:spPr>
+        <p:txBody>
+          <a:bodyPr/>
+          <a:lstStyle/>
+          <a:p>
+            <a:endParaRPr lang="es-ES"/>
+          </a:p>
+        </p:txBody>
       </p:sp>
       <p:sp>
         <p:nvSpPr>
@@ -2640,6 +3178,13 @@
             <a:prstDash val="solid"/>
           </a:ln>
         </p:spPr>
+        <p:txBody>
+          <a:bodyPr/>
+          <a:lstStyle/>
+          <a:p>
+            <a:endParaRPr lang="es-ES"/>
+          </a:p>
+        </p:txBody>
       </p:sp>
       <p:sp>
         <p:nvSpPr>
@@ -2665,6 +3210,13 @@
             <a:prstDash val="solid"/>
           </a:ln>
         </p:spPr>
+        <p:txBody>
+          <a:bodyPr/>
+          <a:lstStyle/>
+          <a:p>
+            <a:endParaRPr lang="es-ES"/>
+          </a:p>
+        </p:txBody>
       </p:sp>
       <p:sp>
         <p:nvSpPr>
@@ -2690,6 +3242,13 @@
             <a:prstDash val="solid"/>
           </a:ln>
         </p:spPr>
+        <p:txBody>
+          <a:bodyPr/>
+          <a:lstStyle/>
+          <a:p>
+            <a:endParaRPr lang="es-ES"/>
+          </a:p>
+        </p:txBody>
       </p:sp>
       <p:sp>
         <p:nvSpPr>
@@ -2712,7 +3271,7 @@
           <a:bodyPr wrap="square" rtlCol="0" anchor="ctr"/>
           <a:lstStyle/>
           <a:p>
-            <a:pPr indent="0" marL="0">
+            <a:pPr marL="0" indent="0">
               <a:buNone/>
             </a:pPr>
             <a:r>
@@ -2751,7 +3310,7 @@
           <a:bodyPr wrap="square" rtlCol="0" anchor="ctr"/>
           <a:lstStyle/>
           <a:p>
-            <a:pPr algn="r" indent="0" marL="0">
+            <a:pPr marL="0" indent="0" algn="r">
               <a:buNone/>
             </a:pPr>
             <a:r>
@@ -2818,6 +3377,13 @@
             <a:prstDash val="solid"/>
           </a:ln>
         </p:spPr>
+        <p:txBody>
+          <a:bodyPr/>
+          <a:lstStyle/>
+          <a:p>
+            <a:endParaRPr lang="es-ES"/>
+          </a:p>
+        </p:txBody>
       </p:sp>
       <p:sp>
         <p:nvSpPr>
@@ -2840,7 +3406,7 @@
           <a:bodyPr wrap="square" rtlCol="0" anchor="ctr"/>
           <a:lstStyle/>
           <a:p>
-            <a:pPr indent="0" marL="0">
+            <a:pPr marL="0" indent="0">
               <a:buNone/>
             </a:pPr>
             <a:r>
@@ -2882,6 +3448,13 @@
             <a:prstDash val="solid"/>
           </a:ln>
         </p:spPr>
+        <p:txBody>
+          <a:bodyPr/>
+          <a:lstStyle/>
+          <a:p>
+            <a:endParaRPr lang="es-ES"/>
+          </a:p>
+        </p:txBody>
       </p:sp>
       <p:sp>
         <p:nvSpPr>
@@ -2904,7 +3477,7 @@
           <a:bodyPr wrap="square" rtlCol="0" anchor="t"/>
           <a:lstStyle/>
           <a:p>
-            <a:pPr indent="0" marL="0">
+            <a:pPr marL="0" indent="0">
               <a:spcAft>
                 <a:spcPts val="800"/>
               </a:spcAft>
@@ -2949,6 +3522,13 @@
             <a:prstDash val="solid"/>
           </a:ln>
         </p:spPr>
+        <p:txBody>
+          <a:bodyPr/>
+          <a:lstStyle/>
+          <a:p>
+            <a:endParaRPr lang="es-ES"/>
+          </a:p>
+        </p:txBody>
       </p:sp>
       <p:sp>
         <p:nvSpPr>
@@ -2971,7 +3551,7 @@
           <a:bodyPr wrap="square" rtlCol="0" anchor="ctr"/>
           <a:lstStyle/>
           <a:p>
-            <a:pPr algn="ctr" indent="0" marL="0">
+            <a:pPr marL="0" indent="0" algn="ctr">
               <a:buNone/>
             </a:pPr>
             <a:r>
@@ -3010,7 +3590,7 @@
           <a:bodyPr wrap="square" rtlCol="0" anchor="t"/>
           <a:lstStyle/>
           <a:p>
-            <a:pPr indent="0" marL="0">
+            <a:pPr marL="0" indent="0">
               <a:spcAft>
                 <a:spcPts val="800"/>
               </a:spcAft>
@@ -3055,6 +3635,13 @@
             <a:prstDash val="solid"/>
           </a:ln>
         </p:spPr>
+        <p:txBody>
+          <a:bodyPr/>
+          <a:lstStyle/>
+          <a:p>
+            <a:endParaRPr lang="es-ES"/>
+          </a:p>
+        </p:txBody>
       </p:sp>
       <p:sp>
         <p:nvSpPr>
@@ -3077,7 +3664,7 @@
           <a:bodyPr wrap="square" rtlCol="0" anchor="t"/>
           <a:lstStyle/>
           <a:p>
-            <a:pPr indent="0" marL="0">
+            <a:pPr marL="0" indent="0">
               <a:spcAft>
                 <a:spcPts val="800"/>
               </a:spcAft>
@@ -3097,7 +3684,7 @@
             <a:endParaRPr lang="en-US" sz="1500" dirty="0"/>
           </a:p>
           <a:p>
-            <a:pPr indent="0" marL="0">
+            <a:pPr marL="0" indent="0">
               <a:spcAft>
                 <a:spcPts val="800"/>
               </a:spcAft>
@@ -3142,6 +3729,13 @@
             <a:prstDash val="solid"/>
           </a:ln>
         </p:spPr>
+        <p:txBody>
+          <a:bodyPr/>
+          <a:lstStyle/>
+          <a:p>
+            <a:endParaRPr lang="es-ES"/>
+          </a:p>
+        </p:txBody>
       </p:sp>
       <p:sp>
         <p:nvSpPr>
@@ -3164,7 +3758,7 @@
           <a:bodyPr wrap="square" rtlCol="0" anchor="ctr"/>
           <a:lstStyle/>
           <a:p>
-            <a:pPr indent="0" marL="0">
+            <a:pPr marL="0" indent="0">
               <a:buNone/>
             </a:pPr>
             <a:r>
@@ -3203,7 +3797,7 @@
           <a:bodyPr wrap="square" rtlCol="0" anchor="ctr"/>
           <a:lstStyle/>
           <a:p>
-            <a:pPr algn="r" indent="0" marL="0">
+            <a:pPr marL="0" indent="0" algn="r">
               <a:buNone/>
             </a:pPr>
             <a:r>
@@ -3270,6 +3864,13 @@
             <a:prstDash val="solid"/>
           </a:ln>
         </p:spPr>
+        <p:txBody>
+          <a:bodyPr/>
+          <a:lstStyle/>
+          <a:p>
+            <a:endParaRPr lang="es-ES"/>
+          </a:p>
+        </p:txBody>
       </p:sp>
       <p:sp>
         <p:nvSpPr>
@@ -3292,7 +3893,7 @@
           <a:bodyPr wrap="square" rtlCol="0" anchor="ctr"/>
           <a:lstStyle/>
           <a:p>
-            <a:pPr indent="0" marL="0">
+            <a:pPr marL="0" indent="0">
               <a:buNone/>
             </a:pPr>
             <a:r>
@@ -3304,7 +3905,7 @@
                 <a:ea typeface="Arial" pitchFamily="34" charset="-122"/>
                 <a:cs typeface="Arial" pitchFamily="34" charset="-120"/>
               </a:rPr>
-              <a:t>Elementos (2/2): flujo, concurrencia y fin</a:t>
+              <a:t>En DIA — iconos de la paleta UML (I)</a:t>
             </a:r>
             <a:endParaRPr lang="en-US" sz="2300" dirty="0"/>
           </a:p>
@@ -3318,32 +3919,61 @@
         </p:nvSpPr>
         <p:spPr>
           <a:xfrm>
-            <a:off x="822960" y="1645920"/>
-            <a:ext cx="1280160" cy="0"/>
-          </a:xfrm>
-          <a:prstGeom prst="line">
-            <a:avLst/>
-          </a:prstGeom>
-          <a:noFill/>
-          <a:ln w="19050">
+            <a:off x="640079" y="1463039"/>
+            <a:ext cx="3746181" cy="3202325"/>
+          </a:xfrm>
+          <a:prstGeom prst="rect">
+            <a:avLst/>
+          </a:prstGeom>
+          <a:ln w="12700">
             <a:solidFill>
-              <a:srgbClr val="212121"/>
+              <a:srgbClr val="EEEEEE"/>
             </a:solidFill>
             <a:prstDash val="solid"/>
-            <a:tailEnd type="triangle"/>
           </a:ln>
         </p:spPr>
-      </p:sp>
-      <p:sp>
-        <p:nvSpPr>
-          <p:cNvPr id="5" name="Text 3"/>
-          <p:cNvSpPr/>
-          <p:nvPr/>
-        </p:nvSpPr>
-        <p:spPr>
-          <a:xfrm>
-            <a:off x="2468880" y="1417320"/>
-            <a:ext cx="9144000" cy="548640"/>
+        <p:txBody>
+          <a:bodyPr/>
+          <a:lstStyle/>
+          <a:p>
+            <a:endParaRPr lang="es-ES"/>
+          </a:p>
+        </p:txBody>
+      </p:sp>
+      <p:pic>
+        <p:nvPicPr>
+          <p:cNvPr id="5" name="Image 0" descr="C:/Users/Aitor/Documents/apuntes-profe/entornos-de-desarrollo/docs/tema6/img/actividad-inicio-icono.png"/>
+          <p:cNvPicPr>
+            <a:picLocks noChangeAspect="1"/>
+          </p:cNvPicPr>
+          <p:nvPr/>
+        </p:nvPicPr>
+        <p:blipFill>
+          <a:blip r:embed="rId3"/>
+          <a:stretch>
+            <a:fillRect/>
+          </a:stretch>
+        </p:blipFill>
+        <p:spPr>
+          <a:xfrm>
+            <a:off x="640079" y="1463039"/>
+            <a:ext cx="4298841" cy="3202325"/>
+          </a:xfrm>
+          <a:prstGeom prst="rect">
+            <a:avLst/>
+          </a:prstGeom>
+        </p:spPr>
+      </p:pic>
+      <p:sp>
+        <p:nvSpPr>
+          <p:cNvPr id="6" name="Text 3"/>
+          <p:cNvSpPr/>
+          <p:nvPr/>
+        </p:nvSpPr>
+        <p:spPr>
+          <a:xfrm>
+            <a:off x="117392" y="4756519"/>
+            <a:ext cx="4397691" cy="436114"/>
           </a:xfrm>
           <a:prstGeom prst="rect">
             <a:avLst/>
@@ -3355,62 +3985,87 @@
           <a:bodyPr wrap="square" rtlCol="0" anchor="t"/>
           <a:lstStyle/>
           <a:p>
-            <a:pPr indent="0" marL="0">
-              <a:spcAft>
-                <a:spcPts val="800"/>
-              </a:spcAft>
+            <a:pPr marL="0" indent="0" algn="ctr">
               <a:buNone/>
             </a:pPr>
             <a:r>
-              <a:rPr lang="en-US" sz="1500" dirty="0">
+              <a:rPr lang="en-US" sz="1400" i="1" dirty="0">
                 <a:solidFill>
-                  <a:srgbClr val="212121"/>
+                  <a:srgbClr val="757575"/>
                 </a:solidFill>
                 <a:latin typeface="Arial" pitchFamily="34" charset="0"/>
                 <a:ea typeface="Arial" pitchFamily="34" charset="-122"/>
                 <a:cs typeface="Arial" pitchFamily="34" charset="-120"/>
               </a:rPr>
-              <a:t>Flujo — flechas que conectan los elementos e indican la dirección del proceso.</a:t>
+              <a:t>Icono de nodo inicial (círculo negro) en DIA</a:t>
             </a:r>
-            <a:endParaRPr lang="en-US" sz="1500" dirty="0"/>
-          </a:p>
-        </p:txBody>
-      </p:sp>
-      <p:sp>
-        <p:nvSpPr>
-          <p:cNvPr id="6" name="Shape 4"/>
-          <p:cNvSpPr/>
-          <p:nvPr/>
-        </p:nvSpPr>
-        <p:spPr>
-          <a:xfrm>
-            <a:off x="822960" y="2514600"/>
-            <a:ext cx="1463040" cy="82296"/>
-          </a:xfrm>
-          <a:prstGeom prst="rect">
-            <a:avLst/>
-          </a:prstGeom>
-          <a:solidFill>
-            <a:srgbClr val="212121"/>
-          </a:solidFill>
+            <a:endParaRPr lang="en-US" sz="1400" dirty="0"/>
+          </a:p>
+        </p:txBody>
+      </p:sp>
+      <p:sp>
+        <p:nvSpPr>
+          <p:cNvPr id="7" name="Shape 4"/>
+          <p:cNvSpPr/>
+          <p:nvPr/>
+        </p:nvSpPr>
+        <p:spPr>
+          <a:xfrm>
+            <a:off x="4343399" y="1463039"/>
+            <a:ext cx="3474719" cy="3189865"/>
+          </a:xfrm>
+          <a:prstGeom prst="rect">
+            <a:avLst/>
+          </a:prstGeom>
           <a:ln w="12700">
             <a:solidFill>
-              <a:srgbClr val="212121"/>
+              <a:srgbClr val="EEEEEE"/>
             </a:solidFill>
             <a:prstDash val="solid"/>
           </a:ln>
         </p:spPr>
-      </p:sp>
-      <p:sp>
-        <p:nvSpPr>
-          <p:cNvPr id="7" name="Text 5"/>
-          <p:cNvSpPr/>
-          <p:nvPr/>
-        </p:nvSpPr>
-        <p:spPr>
-          <a:xfrm>
-            <a:off x="2468880" y="2286000"/>
-            <a:ext cx="9144000" cy="1463040"/>
+        <p:txBody>
+          <a:bodyPr/>
+          <a:lstStyle/>
+          <a:p>
+            <a:endParaRPr lang="es-ES"/>
+          </a:p>
+        </p:txBody>
+      </p:sp>
+      <p:pic>
+        <p:nvPicPr>
+          <p:cNvPr id="8" name="Image 1" descr="C:/Users/Aitor/Documents/apuntes-profe/entornos-de-desarrollo/docs/tema6/img/actividad-nodo-icono.png"/>
+          <p:cNvPicPr>
+            <a:picLocks noChangeAspect="1"/>
+          </p:cNvPicPr>
+          <p:nvPr/>
+        </p:nvPicPr>
+        <p:blipFill>
+          <a:blip r:embed="rId4"/>
+          <a:stretch>
+            <a:fillRect/>
+          </a:stretch>
+        </p:blipFill>
+        <p:spPr>
+          <a:xfrm>
+            <a:off x="4280704" y="1568863"/>
+            <a:ext cx="3987331" cy="3189865"/>
+          </a:xfrm>
+          <a:prstGeom prst="rect">
+            <a:avLst/>
+          </a:prstGeom>
+        </p:spPr>
+      </p:pic>
+      <p:sp>
+        <p:nvSpPr>
+          <p:cNvPr id="9" name="Text 5"/>
+          <p:cNvSpPr/>
+          <p:nvPr/>
+        </p:nvSpPr>
+        <p:spPr>
+          <a:xfrm>
+            <a:off x="4439897" y="4812223"/>
+            <a:ext cx="3237022" cy="436114"/>
           </a:xfrm>
           <a:prstGeom prst="rect">
             <a:avLst/>
@@ -3422,127 +4077,126 @@
           <a:bodyPr wrap="square" rtlCol="0" anchor="t"/>
           <a:lstStyle/>
           <a:p>
-            <a:pPr indent="0" marL="0">
-              <a:spcAft>
-                <a:spcPts val="800"/>
-              </a:spcAft>
+            <a:pPr marL="0" indent="0" algn="ctr">
               <a:buNone/>
             </a:pPr>
             <a:r>
-              <a:rPr lang="en-US" sz="1500" dirty="0">
+              <a:rPr lang="en-US" sz="1400" i="1" dirty="0">
                 <a:solidFill>
-                  <a:srgbClr val="212121"/>
+                  <a:srgbClr val="757575"/>
                 </a:solidFill>
                 <a:latin typeface="Arial" pitchFamily="34" charset="0"/>
                 <a:ea typeface="Arial" pitchFamily="34" charset="-122"/>
                 <a:cs typeface="Arial" pitchFamily="34" charset="-120"/>
               </a:rPr>
-              <a:t>Concurrencia — barras gruesas de sincronización:</a:t>
+              <a:t>Icono de actividad (rectángulo redondeado) en DIA</a:t>
             </a:r>
-            <a:endParaRPr lang="en-US" sz="1500" dirty="0"/>
-          </a:p>
-          <a:p>
-            <a:pPr lvl="1" indent="0" marL="0">
-              <a:spcAft>
-                <a:spcPts val="800"/>
-              </a:spcAft>
+            <a:endParaRPr lang="en-US" sz="1400" dirty="0"/>
+          </a:p>
+        </p:txBody>
+      </p:sp>
+      <p:sp>
+        <p:nvSpPr>
+          <p:cNvPr id="10" name="Shape 6"/>
+          <p:cNvSpPr/>
+          <p:nvPr/>
+        </p:nvSpPr>
+        <p:spPr>
+          <a:xfrm>
+            <a:off x="7909559" y="1463040"/>
+            <a:ext cx="3474719" cy="3164944"/>
+          </a:xfrm>
+          <a:prstGeom prst="rect">
+            <a:avLst/>
+          </a:prstGeom>
+          <a:ln w="12700">
+            <a:solidFill>
+              <a:srgbClr val="EEEEEE"/>
+            </a:solidFill>
+            <a:prstDash val="solid"/>
+          </a:ln>
+        </p:spPr>
+        <p:txBody>
+          <a:bodyPr/>
+          <a:lstStyle/>
+          <a:p>
+            <a:endParaRPr lang="es-ES"/>
+          </a:p>
+        </p:txBody>
+      </p:sp>
+      <p:pic>
+        <p:nvPicPr>
+          <p:cNvPr id="11" name="Image 2" descr="C:/Users/Aitor/Documents/apuntes-profe/entornos-de-desarrollo/docs/tema6/img/actividad-decision-icono.png"/>
+          <p:cNvPicPr>
+            <a:picLocks noChangeAspect="1"/>
+          </p:cNvPicPr>
+          <p:nvPr/>
+        </p:nvPicPr>
+        <p:blipFill>
+          <a:blip r:embed="rId5"/>
+          <a:stretch>
+            <a:fillRect/>
+          </a:stretch>
+        </p:blipFill>
+        <p:spPr>
+          <a:xfrm>
+            <a:off x="7911297" y="1412883"/>
+            <a:ext cx="3987331" cy="3164944"/>
+          </a:xfrm>
+          <a:prstGeom prst="rect">
+            <a:avLst/>
+          </a:prstGeom>
+        </p:spPr>
+      </p:pic>
+      <p:sp>
+        <p:nvSpPr>
+          <p:cNvPr id="12" name="Text 7"/>
+          <p:cNvSpPr/>
+          <p:nvPr/>
+        </p:nvSpPr>
+        <p:spPr>
+          <a:xfrm>
+            <a:off x="8088797" y="4812223"/>
+            <a:ext cx="3474720" cy="320040"/>
+          </a:xfrm>
+          <a:prstGeom prst="rect">
+            <a:avLst/>
+          </a:prstGeom>
+          <a:noFill/>
+          <a:ln/>
+        </p:spPr>
+        <p:txBody>
+          <a:bodyPr wrap="square" rtlCol="0" anchor="t"/>
+          <a:lstStyle/>
+          <a:p>
+            <a:pPr marL="0" indent="0" algn="ctr">
               <a:buNone/>
             </a:pPr>
             <a:r>
-              <a:rPr lang="en-US" sz="1500" dirty="0">
+              <a:rPr lang="en-US" sz="1400" i="1" dirty="0">
                 <a:solidFill>
-                  <a:srgbClr val="212121"/>
+                  <a:srgbClr val="757575"/>
                 </a:solidFill>
                 <a:latin typeface="Arial" pitchFamily="34" charset="0"/>
                 <a:ea typeface="Arial" pitchFamily="34" charset="-122"/>
                 <a:cs typeface="Arial" pitchFamily="34" charset="-120"/>
               </a:rPr>
-              <a:t>•  La barra de APERTURA (fork) divide el flujo en ramas que se ejecutan a la vez.</a:t>
+              <a:t>Icono de decisión (rombo hueco) en DIA</a:t>
             </a:r>
-            <a:endParaRPr lang="en-US" sz="1500" dirty="0"/>
-          </a:p>
-          <a:p>
-            <a:pPr lvl="1" indent="0" marL="0">
-              <a:spcAft>
-                <a:spcPts val="800"/>
-              </a:spcAft>
-              <a:buNone/>
-            </a:pPr>
-            <a:r>
-              <a:rPr lang="en-US" sz="1500" dirty="0">
-                <a:solidFill>
-                  <a:srgbClr val="212121"/>
-                </a:solidFill>
-                <a:latin typeface="Arial" pitchFamily="34" charset="0"/>
-                <a:ea typeface="Arial" pitchFamily="34" charset="-122"/>
-                <a:cs typeface="Arial" pitchFamily="34" charset="-120"/>
-              </a:rPr>
-              <a:t>•  La de CIERRE (join) espera a que TODAS las ramas terminen para continuar.</a:t>
-            </a:r>
-            <a:endParaRPr lang="en-US" sz="1500" dirty="0"/>
-          </a:p>
-        </p:txBody>
-      </p:sp>
-      <p:sp>
-        <p:nvSpPr>
-          <p:cNvPr id="8" name="Shape 6"/>
-          <p:cNvSpPr/>
-          <p:nvPr/>
-        </p:nvSpPr>
-        <p:spPr>
-          <a:xfrm>
-            <a:off x="1024128" y="4041648"/>
-            <a:ext cx="329184" cy="329184"/>
-          </a:xfrm>
-          <a:prstGeom prst="ellipse">
-            <a:avLst/>
-          </a:prstGeom>
-          <a:solidFill>
-            <a:srgbClr val="FFFFFF"/>
-          </a:solidFill>
-          <a:ln w="25400">
-            <a:solidFill>
-              <a:srgbClr val="212121"/>
-            </a:solidFill>
-            <a:prstDash val="solid"/>
-          </a:ln>
-        </p:spPr>
-      </p:sp>
-      <p:sp>
-        <p:nvSpPr>
-          <p:cNvPr id="9" name="Shape 7"/>
-          <p:cNvSpPr/>
-          <p:nvPr/>
-        </p:nvSpPr>
-        <p:spPr>
-          <a:xfrm>
-            <a:off x="1098194" y="4115714"/>
-            <a:ext cx="181051" cy="181051"/>
-          </a:xfrm>
-          <a:prstGeom prst="ellipse">
-            <a:avLst/>
-          </a:prstGeom>
-          <a:solidFill>
-            <a:srgbClr val="212121"/>
-          </a:solidFill>
-          <a:ln w="12700">
-            <a:solidFill>
-              <a:srgbClr val="212121"/>
-            </a:solidFill>
-            <a:prstDash val="solid"/>
-          </a:ln>
-        </p:spPr>
-      </p:sp>
-      <p:sp>
-        <p:nvSpPr>
-          <p:cNvPr id="10" name="Text 8"/>
-          <p:cNvSpPr/>
-          <p:nvPr/>
-        </p:nvSpPr>
-        <p:spPr>
-          <a:xfrm>
-            <a:off x="2468880" y="3977640"/>
-            <a:ext cx="9144000" cy="822960"/>
+            <a:endParaRPr lang="en-US" sz="1400" dirty="0"/>
+          </a:p>
+        </p:txBody>
+      </p:sp>
+      <p:sp>
+        <p:nvSpPr>
+          <p:cNvPr id="13" name="Text 8"/>
+          <p:cNvSpPr/>
+          <p:nvPr/>
+        </p:nvSpPr>
+        <p:spPr>
+          <a:xfrm>
+            <a:off x="548640" y="6473952"/>
+            <a:ext cx="11091672" cy="292608"/>
           </a:xfrm>
           <a:prstGeom prst="rect">
             <a:avLst/>
@@ -3551,116 +4205,10 @@
           <a:ln/>
         </p:spPr>
         <p:txBody>
-          <a:bodyPr wrap="square" rtlCol="0" anchor="t"/>
-          <a:lstStyle/>
-          <a:p>
-            <a:pPr indent="0" marL="0">
-              <a:spcAft>
-                <a:spcPts val="800"/>
-              </a:spcAft>
-              <a:buNone/>
-            </a:pPr>
-            <a:r>
-              <a:rPr lang="en-US" sz="1500" dirty="0">
-                <a:solidFill>
-                  <a:srgbClr val="212121"/>
-                </a:solidFill>
-                <a:latin typeface="Arial" pitchFamily="34" charset="0"/>
-                <a:ea typeface="Arial" pitchFamily="34" charset="-122"/>
-                <a:cs typeface="Arial" pitchFamily="34" charset="-120"/>
-              </a:rPr>
-              <a:t>Fin — círculo con borde grueso. Puede haber varios nodos de fin en un mismo diagrama (un final feliz y otro de cancelación, por ejemplo).</a:t>
-            </a:r>
-            <a:endParaRPr lang="en-US" sz="1500" dirty="0"/>
-          </a:p>
-        </p:txBody>
-      </p:sp>
-      <p:sp>
-        <p:nvSpPr>
-          <p:cNvPr id="11" name="Shape 9"/>
-          <p:cNvSpPr/>
-          <p:nvPr/>
-        </p:nvSpPr>
-        <p:spPr>
-          <a:xfrm>
-            <a:off x="548640" y="5029200"/>
-            <a:ext cx="11091672" cy="1005840"/>
-          </a:xfrm>
-          <a:prstGeom prst="roundRect">
-            <a:avLst/>
-          </a:prstGeom>
-          <a:solidFill>
-            <a:srgbClr val="FFF8E1"/>
-          </a:solidFill>
-          <a:ln w="19050">
-            <a:solidFill>
-              <a:srgbClr val="F9A825"/>
-            </a:solidFill>
-            <a:prstDash val="solid"/>
-          </a:ln>
-        </p:spPr>
-      </p:sp>
-      <p:sp>
-        <p:nvSpPr>
-          <p:cNvPr id="12" name="Text 10"/>
-          <p:cNvSpPr/>
-          <p:nvPr/>
-        </p:nvSpPr>
-        <p:spPr>
-          <a:xfrm>
-            <a:off x="777240" y="5102352"/>
-            <a:ext cx="10634472" cy="859536"/>
-          </a:xfrm>
-          <a:prstGeom prst="rect">
-            <a:avLst/>
-          </a:prstGeom>
-          <a:noFill/>
-          <a:ln/>
-        </p:spPr>
-        <p:txBody>
           <a:bodyPr wrap="square" rtlCol="0" anchor="ctr"/>
           <a:lstStyle/>
           <a:p>
-            <a:pPr indent="0" marL="0">
-              <a:buNone/>
-            </a:pPr>
-            <a:r>
-              <a:rPr lang="en-US" sz="1400" dirty="0">
-                <a:solidFill>
-                  <a:srgbClr val="212121"/>
-                </a:solidFill>
-                <a:latin typeface="Arial" pitchFamily="34" charset="0"/>
-                <a:ea typeface="Arial" pitchFamily="34" charset="-122"/>
-                <a:cs typeface="Arial" pitchFamily="34" charset="-120"/>
-              </a:rPr>
-              <a:t>Rombo y barra se parecen pero no se mezclan: el rombo ELIGE un camino (con guardas); la barra los ejecuta TODOS a la vez (sin guardas). Si pones condiciones en una barra, en realidad querías un rombo.</a:t>
-            </a:r>
-            <a:endParaRPr lang="en-US" sz="1400" dirty="0"/>
-          </a:p>
-        </p:txBody>
-      </p:sp>
-      <p:sp>
-        <p:nvSpPr>
-          <p:cNvPr id="13" name="Text 11"/>
-          <p:cNvSpPr/>
-          <p:nvPr/>
-        </p:nvSpPr>
-        <p:spPr>
-          <a:xfrm>
-            <a:off x="548640" y="6473952"/>
-            <a:ext cx="11091672" cy="292608"/>
-          </a:xfrm>
-          <a:prstGeom prst="rect">
-            <a:avLst/>
-          </a:prstGeom>
-          <a:noFill/>
-          <a:ln/>
-        </p:spPr>
-        <p:txBody>
-          <a:bodyPr wrap="square" rtlCol="0" anchor="ctr"/>
-          <a:lstStyle/>
-          <a:p>
-            <a:pPr algn="r" indent="0" marL="0">
+            <a:pPr marL="0" indent="0" algn="r">
               <a:buNone/>
             </a:pPr>
             <a:r>
@@ -3727,6 +4275,13 @@
             <a:prstDash val="solid"/>
           </a:ln>
         </p:spPr>
+        <p:txBody>
+          <a:bodyPr/>
+          <a:lstStyle/>
+          <a:p>
+            <a:endParaRPr lang="es-ES"/>
+          </a:p>
+        </p:txBody>
       </p:sp>
       <p:sp>
         <p:nvSpPr>
@@ -3749,7 +4304,7 @@
           <a:bodyPr wrap="square" rtlCol="0" anchor="ctr"/>
           <a:lstStyle/>
           <a:p>
-            <a:pPr indent="0" marL="0">
+            <a:pPr marL="0" indent="0">
               <a:buNone/>
             </a:pPr>
             <a:r>
@@ -3761,46 +4316,53 @@
                 <a:ea typeface="Arial" pitchFamily="34" charset="-122"/>
                 <a:cs typeface="Arial" pitchFamily="34" charset="-120"/>
               </a:rPr>
-              <a:t>Ejemplo leído paso a paso: máquina de café</a:t>
+              <a:t>Elementos (2/2): flujo, concurrencia y fin</a:t>
             </a:r>
             <a:endParaRPr lang="en-US" sz="2300" dirty="0"/>
           </a:p>
         </p:txBody>
       </p:sp>
-      <p:pic>
-        <p:nvPicPr>
-          <p:cNvPr id="4" name="Image 0" descr="C:/Users/Aitor/Documents/apuntes-profe/entornos-de-desarrollo/docs/tema6/img/actividad-cafe-completo.png">    </p:cNvPr>
-          <p:cNvPicPr>
-            <a:picLocks noChangeAspect="1"/>
-          </p:cNvPicPr>
-          <p:nvPr/>
-        </p:nvPicPr>
-        <p:blipFill>
-          <a:blip r:embed="rId1"/>
-          <a:stretch>
-            <a:fillRect/>
-          </a:stretch>
-        </p:blipFill>
-        <p:spPr>
-          <a:xfrm>
-            <a:off x="457200" y="1005840"/>
-            <a:ext cx="6035040" cy="4434840"/>
-          </a:xfrm>
-          <a:prstGeom prst="rect">
-            <a:avLst/>
-          </a:prstGeom>
-        </p:spPr>
-      </p:pic>
-      <p:sp>
-        <p:nvSpPr>
-          <p:cNvPr id="5" name="Text 2"/>
-          <p:cNvSpPr/>
-          <p:nvPr/>
-        </p:nvSpPr>
-        <p:spPr>
-          <a:xfrm>
-            <a:off x="6766560" y="1097280"/>
-            <a:ext cx="4937760" cy="4206240"/>
+      <p:sp>
+        <p:nvSpPr>
+          <p:cNvPr id="4" name="Shape 2"/>
+          <p:cNvSpPr/>
+          <p:nvPr/>
+        </p:nvSpPr>
+        <p:spPr>
+          <a:xfrm>
+            <a:off x="822960" y="1645920"/>
+            <a:ext cx="1280160" cy="0"/>
+          </a:xfrm>
+          <a:prstGeom prst="line">
+            <a:avLst/>
+          </a:prstGeom>
+          <a:noFill/>
+          <a:ln w="19050">
+            <a:solidFill>
+              <a:srgbClr val="212121"/>
+            </a:solidFill>
+            <a:prstDash val="solid"/>
+            <a:tailEnd type="triangle"/>
+          </a:ln>
+        </p:spPr>
+        <p:txBody>
+          <a:bodyPr/>
+          <a:lstStyle/>
+          <a:p>
+            <a:endParaRPr lang="es-ES"/>
+          </a:p>
+        </p:txBody>
+      </p:sp>
+      <p:sp>
+        <p:nvSpPr>
+          <p:cNvPr id="5" name="Text 3"/>
+          <p:cNvSpPr/>
+          <p:nvPr/>
+        </p:nvSpPr>
+        <p:spPr>
+          <a:xfrm>
+            <a:off x="2468880" y="1417320"/>
+            <a:ext cx="9144000" cy="548640"/>
           </a:xfrm>
           <a:prstGeom prst="rect">
             <a:avLst/>
@@ -3812,14 +4374,14 @@
           <a:bodyPr wrap="square" rtlCol="0" anchor="t"/>
           <a:lstStyle/>
           <a:p>
-            <a:pPr indent="0" marL="0">
+            <a:pPr marL="0" indent="0">
               <a:spcAft>
                 <a:spcPts val="800"/>
               </a:spcAft>
               <a:buNone/>
             </a:pPr>
             <a:r>
-              <a:rPr lang="en-US" sz="1300" dirty="0">
+              <a:rPr lang="en-US" sz="1500" dirty="0">
                 <a:solidFill>
                   <a:srgbClr val="212121"/>
                 </a:solidFill>
@@ -3827,19 +4389,73 @@
                 <a:ea typeface="Arial" pitchFamily="34" charset="-122"/>
                 <a:cs typeface="Arial" pitchFamily="34" charset="-120"/>
               </a:rPr>
-              <a:t>•  1. Elegir bebida e Introducir monedas: secuencia normal.</a:t>
+              <a:t>Flujo — flechas que conectan los elementos e indican la dirección del proceso.</a:t>
             </a:r>
-            <a:endParaRPr lang="en-US" sz="1300" dirty="0"/>
-          </a:p>
-          <a:p>
-            <a:pPr indent="0" marL="0">
+            <a:endParaRPr lang="en-US" sz="1500" dirty="0"/>
+          </a:p>
+        </p:txBody>
+      </p:sp>
+      <p:sp>
+        <p:nvSpPr>
+          <p:cNvPr id="6" name="Shape 4"/>
+          <p:cNvSpPr/>
+          <p:nvPr/>
+        </p:nvSpPr>
+        <p:spPr>
+          <a:xfrm>
+            <a:off x="822960" y="2514600"/>
+            <a:ext cx="1463040" cy="82296"/>
+          </a:xfrm>
+          <a:prstGeom prst="rect">
+            <a:avLst/>
+          </a:prstGeom>
+          <a:solidFill>
+            <a:srgbClr val="212121"/>
+          </a:solidFill>
+          <a:ln w="12700">
+            <a:solidFill>
+              <a:srgbClr val="212121"/>
+            </a:solidFill>
+            <a:prstDash val="solid"/>
+          </a:ln>
+        </p:spPr>
+        <p:txBody>
+          <a:bodyPr/>
+          <a:lstStyle/>
+          <a:p>
+            <a:endParaRPr lang="es-ES"/>
+          </a:p>
+        </p:txBody>
+      </p:sp>
+      <p:sp>
+        <p:nvSpPr>
+          <p:cNvPr id="7" name="Text 5"/>
+          <p:cNvSpPr/>
+          <p:nvPr/>
+        </p:nvSpPr>
+        <p:spPr>
+          <a:xfrm>
+            <a:off x="2468880" y="2286000"/>
+            <a:ext cx="9144000" cy="1463040"/>
+          </a:xfrm>
+          <a:prstGeom prst="rect">
+            <a:avLst/>
+          </a:prstGeom>
+          <a:noFill/>
+          <a:ln/>
+        </p:spPr>
+        <p:txBody>
+          <a:bodyPr wrap="square" rtlCol="0" anchor="t"/>
+          <a:lstStyle/>
+          <a:p>
+            <a:pPr marL="0" indent="0">
               <a:spcAft>
                 <a:spcPts val="800"/>
               </a:spcAft>
               <a:buNone/>
             </a:pPr>
             <a:r>
-              <a:rPr lang="en-US" sz="1300" dirty="0">
+              <a:rPr lang="en-US" sz="1500" dirty="0">
                 <a:solidFill>
                   <a:srgbClr val="212121"/>
                 </a:solidFill>
@@ -3847,19 +4463,19 @@
                 <a:ea typeface="Arial" pitchFamily="34" charset="-122"/>
                 <a:cs typeface="Arial" pitchFamily="34" charset="-120"/>
               </a:rPr>
-              <a:t>•  2. La primera barra abre TRES ramas a la vez: mensaje "Sirviendo café", preparar la bebida y devolver el cambio.</a:t>
+              <a:t>Concurrencia — barras gruesas de sincronización:</a:t>
             </a:r>
-            <a:endParaRPr lang="en-US" sz="1300" dirty="0"/>
-          </a:p>
-          <a:p>
-            <a:pPr indent="0" marL="0">
+            <a:endParaRPr lang="en-US" sz="1500" dirty="0"/>
+          </a:p>
+          <a:p>
+            <a:pPr marL="0" lvl="1" indent="0">
               <a:spcAft>
                 <a:spcPts val="800"/>
               </a:spcAft>
               <a:buNone/>
             </a:pPr>
             <a:r>
-              <a:rPr lang="en-US" sz="1300" dirty="0">
+              <a:rPr lang="en-US" sz="1500" dirty="0">
                 <a:solidFill>
                   <a:srgbClr val="212121"/>
                 </a:solidFill>
@@ -3867,19 +4483,19 @@
                 <a:ea typeface="Arial" pitchFamily="34" charset="-122"/>
                 <a:cs typeface="Arial" pitchFamily="34" charset="-120"/>
               </a:rPr>
-              <a:t>•  3. La rama central pasa por un rombo con guardas excluyentes: [café], [capuchino] o [cortado] deciden qué se sirve.</a:t>
+              <a:t>•  La barra de APERTURA (fork) divide el flujo en ramas que se ejecutan a la vez.</a:t>
             </a:r>
-            <a:endParaRPr lang="en-US" sz="1300" dirty="0"/>
-          </a:p>
-          <a:p>
-            <a:pPr indent="0" marL="0">
+            <a:endParaRPr lang="en-US" sz="1500" dirty="0"/>
+          </a:p>
+          <a:p>
+            <a:pPr marL="0" lvl="1" indent="0">
               <a:spcAft>
                 <a:spcPts val="800"/>
               </a:spcAft>
               <a:buNone/>
             </a:pPr>
             <a:r>
-              <a:rPr lang="en-US" sz="1300" dirty="0">
+              <a:rPr lang="en-US" sz="1500" dirty="0">
                 <a:solidFill>
                   <a:srgbClr val="212121"/>
                 </a:solidFill>
@@ -3887,19 +4503,105 @@
                 <a:ea typeface="Arial" pitchFamily="34" charset="-122"/>
                 <a:cs typeface="Arial" pitchFamily="34" charset="-120"/>
               </a:rPr>
-              <a:t>•  4. Un segundo rombo reagrupa los tres caminos.</a:t>
+              <a:t>•  La de CIERRE (join) espera a que TODAS las ramas terminen para continuar.</a:t>
             </a:r>
-            <a:endParaRPr lang="en-US" sz="1300" dirty="0"/>
-          </a:p>
-          <a:p>
-            <a:pPr indent="0" marL="0">
+            <a:endParaRPr lang="en-US" sz="1500" dirty="0"/>
+          </a:p>
+        </p:txBody>
+      </p:sp>
+      <p:sp>
+        <p:nvSpPr>
+          <p:cNvPr id="8" name="Shape 6"/>
+          <p:cNvSpPr/>
+          <p:nvPr/>
+        </p:nvSpPr>
+        <p:spPr>
+          <a:xfrm>
+            <a:off x="1024128" y="4041648"/>
+            <a:ext cx="329184" cy="329184"/>
+          </a:xfrm>
+          <a:prstGeom prst="ellipse">
+            <a:avLst/>
+          </a:prstGeom>
+          <a:solidFill>
+            <a:srgbClr val="FFFFFF"/>
+          </a:solidFill>
+          <a:ln w="25400">
+            <a:solidFill>
+              <a:srgbClr val="212121"/>
+            </a:solidFill>
+            <a:prstDash val="solid"/>
+          </a:ln>
+        </p:spPr>
+        <p:txBody>
+          <a:bodyPr/>
+          <a:lstStyle/>
+          <a:p>
+            <a:endParaRPr lang="es-ES"/>
+          </a:p>
+        </p:txBody>
+      </p:sp>
+      <p:sp>
+        <p:nvSpPr>
+          <p:cNvPr id="9" name="Shape 7"/>
+          <p:cNvSpPr/>
+          <p:nvPr/>
+        </p:nvSpPr>
+        <p:spPr>
+          <a:xfrm>
+            <a:off x="1098194" y="4115714"/>
+            <a:ext cx="181051" cy="181051"/>
+          </a:xfrm>
+          <a:prstGeom prst="ellipse">
+            <a:avLst/>
+          </a:prstGeom>
+          <a:solidFill>
+            <a:srgbClr val="212121"/>
+          </a:solidFill>
+          <a:ln w="12700">
+            <a:solidFill>
+              <a:srgbClr val="212121"/>
+            </a:solidFill>
+            <a:prstDash val="solid"/>
+          </a:ln>
+        </p:spPr>
+        <p:txBody>
+          <a:bodyPr/>
+          <a:lstStyle/>
+          <a:p>
+            <a:endParaRPr lang="es-ES"/>
+          </a:p>
+        </p:txBody>
+      </p:sp>
+      <p:sp>
+        <p:nvSpPr>
+          <p:cNvPr id="10" name="Text 8"/>
+          <p:cNvSpPr/>
+          <p:nvPr/>
+        </p:nvSpPr>
+        <p:spPr>
+          <a:xfrm>
+            <a:off x="2468880" y="3977640"/>
+            <a:ext cx="9144000" cy="822960"/>
+          </a:xfrm>
+          <a:prstGeom prst="rect">
+            <a:avLst/>
+          </a:prstGeom>
+          <a:noFill/>
+          <a:ln/>
+        </p:spPr>
+        <p:txBody>
+          <a:bodyPr wrap="square" rtlCol="0" anchor="t"/>
+          <a:lstStyle/>
+          <a:p>
+            <a:pPr marL="0" indent="0">
               <a:spcAft>
                 <a:spcPts val="800"/>
               </a:spcAft>
               <a:buNone/>
             </a:pPr>
             <a:r>
-              <a:rPr lang="en-US" sz="1300" dirty="0">
+              <a:rPr lang="en-US" sz="1500" dirty="0">
                 <a:solidFill>
                   <a:srgbClr val="212121"/>
                 </a:solidFill>
@@ -3907,15 +4609,86 @@
                 <a:ea typeface="Arial" pitchFamily="34" charset="-122"/>
                 <a:cs typeface="Arial" pitchFamily="34" charset="-120"/>
               </a:rPr>
-              <a:t>•  5. El join espera a que las tres ramas acaben; solo entonces "Recoja su café" y nodo final.</a:t>
+              <a:t>Fin — círculo con borde grueso. Puede haber varios nodos de fin en un mismo diagrama (un final feliz y otro de cancelación, por ejemplo).</a:t>
             </a:r>
-            <a:endParaRPr lang="en-US" sz="1300" dirty="0"/>
-          </a:p>
-        </p:txBody>
-      </p:sp>
-      <p:sp>
-        <p:nvSpPr>
-          <p:cNvPr id="6" name="Text 3"/>
+            <a:endParaRPr lang="en-US" sz="1500" dirty="0"/>
+          </a:p>
+        </p:txBody>
+      </p:sp>
+      <p:sp>
+        <p:nvSpPr>
+          <p:cNvPr id="11" name="Shape 9"/>
+          <p:cNvSpPr/>
+          <p:nvPr/>
+        </p:nvSpPr>
+        <p:spPr>
+          <a:xfrm>
+            <a:off x="548640" y="5029200"/>
+            <a:ext cx="11091672" cy="1005840"/>
+          </a:xfrm>
+          <a:prstGeom prst="roundRect">
+            <a:avLst/>
+          </a:prstGeom>
+          <a:solidFill>
+            <a:srgbClr val="FFF8E1"/>
+          </a:solidFill>
+          <a:ln w="19050">
+            <a:solidFill>
+              <a:srgbClr val="F9A825"/>
+            </a:solidFill>
+            <a:prstDash val="solid"/>
+          </a:ln>
+        </p:spPr>
+        <p:txBody>
+          <a:bodyPr/>
+          <a:lstStyle/>
+          <a:p>
+            <a:endParaRPr lang="es-ES"/>
+          </a:p>
+        </p:txBody>
+      </p:sp>
+      <p:sp>
+        <p:nvSpPr>
+          <p:cNvPr id="12" name="Text 10"/>
+          <p:cNvSpPr/>
+          <p:nvPr/>
+        </p:nvSpPr>
+        <p:spPr>
+          <a:xfrm>
+            <a:off x="777240" y="5102352"/>
+            <a:ext cx="10634472" cy="859536"/>
+          </a:xfrm>
+          <a:prstGeom prst="rect">
+            <a:avLst/>
+          </a:prstGeom>
+          <a:noFill/>
+          <a:ln/>
+        </p:spPr>
+        <p:txBody>
+          <a:bodyPr wrap="square" rtlCol="0" anchor="ctr"/>
+          <a:lstStyle/>
+          <a:p>
+            <a:pPr marL="0" indent="0">
+              <a:buNone/>
+            </a:pPr>
+            <a:r>
+              <a:rPr lang="en-US" sz="1400" dirty="0">
+                <a:solidFill>
+                  <a:srgbClr val="212121"/>
+                </a:solidFill>
+                <a:latin typeface="Arial" pitchFamily="34" charset="0"/>
+                <a:ea typeface="Arial" pitchFamily="34" charset="-122"/>
+                <a:cs typeface="Arial" pitchFamily="34" charset="-120"/>
+              </a:rPr>
+              <a:t>Rombo y barra se parecen pero no se mezclan: el rombo ELIGE un camino (con guardas); la barra los ejecuta TODOS a la vez (sin guardas). Si pones condiciones en una barra, en realidad querías un rombo.</a:t>
+            </a:r>
+            <a:endParaRPr lang="en-US" sz="1400" dirty="0"/>
+          </a:p>
+        </p:txBody>
+      </p:sp>
+      <p:sp>
+        <p:nvSpPr>
+          <p:cNvPr id="13" name="Text 11"/>
           <p:cNvSpPr/>
           <p:nvPr/>
         </p:nvSpPr>
@@ -3934,7 +4707,1793 @@
           <a:bodyPr wrap="square" rtlCol="0" anchor="ctr"/>
           <a:lstStyle/>
           <a:p>
-            <a:pPr algn="r" indent="0" marL="0">
+            <a:pPr marL="0" indent="0" algn="r">
+              <a:buNone/>
+            </a:pPr>
+            <a:r>
+              <a:rPr lang="en-US" sz="1100" dirty="0">
+                <a:solidFill>
+                  <a:srgbClr val="757575"/>
+                </a:solidFill>
+                <a:latin typeface="Arial" pitchFamily="34" charset="0"/>
+                <a:ea typeface="Arial" pitchFamily="34" charset="-122"/>
+                <a:cs typeface="Arial" pitchFamily="34" charset="-120"/>
+              </a:rPr>
+              <a:t>Entornos de Desarrollo — Tema 6 · Diagrama de actividades</a:t>
+            </a:r>
+            <a:endParaRPr lang="en-US" sz="1100" dirty="0"/>
+          </a:p>
+        </p:txBody>
+      </p:sp>
+    </p:spTree>
+  </p:cSld>
+  <p:clrMapOvr>
+    <a:masterClrMapping/>
+  </p:clrMapOvr>
+</p:sld>
+</file>
+
+<file path=ppt/slides/slide7.xml><?xml version="1.0" encoding="utf-8"?>
+<p:sld xmlns:a="http://schemas.openxmlformats.org/drawingml/2006/main" xmlns:r="http://schemas.openxmlformats.org/officeDocument/2006/relationships" xmlns:p="http://schemas.openxmlformats.org/presentationml/2006/main">
+  <p:cSld name="Slide 7">
+    <p:spTree>
+      <p:nvGrpSpPr>
+        <p:cNvPr id="1" name=""/>
+        <p:cNvGrpSpPr/>
+        <p:nvPr/>
+      </p:nvGrpSpPr>
+      <p:grpSpPr>
+        <a:xfrm>
+          <a:off x="0" y="0"/>
+          <a:ext cx="0" cy="0"/>
+          <a:chOff x="0" y="0"/>
+          <a:chExt cx="0" cy="0"/>
+        </a:xfrm>
+      </p:grpSpPr>
+      <p:sp>
+        <p:nvSpPr>
+          <p:cNvPr id="2" name="Shape 0"/>
+          <p:cNvSpPr/>
+          <p:nvPr/>
+        </p:nvSpPr>
+        <p:spPr>
+          <a:xfrm>
+            <a:off x="0" y="0"/>
+            <a:ext cx="12188952" cy="777240"/>
+          </a:xfrm>
+          <a:prstGeom prst="rect">
+            <a:avLst/>
+          </a:prstGeom>
+          <a:solidFill>
+            <a:srgbClr val="303F9F"/>
+          </a:solidFill>
+          <a:ln w="12700">
+            <a:solidFill>
+              <a:srgbClr val="303F9F"/>
+            </a:solidFill>
+            <a:prstDash val="solid"/>
+          </a:ln>
+        </p:spPr>
+        <p:txBody>
+          <a:bodyPr/>
+          <a:lstStyle/>
+          <a:p>
+            <a:endParaRPr lang="es-ES"/>
+          </a:p>
+        </p:txBody>
+      </p:sp>
+      <p:sp>
+        <p:nvSpPr>
+          <p:cNvPr id="3" name="Text 1"/>
+          <p:cNvSpPr/>
+          <p:nvPr/>
+        </p:nvSpPr>
+        <p:spPr>
+          <a:xfrm>
+            <a:off x="365760" y="0"/>
+            <a:ext cx="11457432" cy="777240"/>
+          </a:xfrm>
+          <a:prstGeom prst="rect">
+            <a:avLst/>
+          </a:prstGeom>
+          <a:noFill/>
+          <a:ln/>
+        </p:spPr>
+        <p:txBody>
+          <a:bodyPr wrap="square" rtlCol="0" anchor="ctr"/>
+          <a:lstStyle/>
+          <a:p>
+            <a:pPr marL="0" indent="0">
+              <a:buNone/>
+            </a:pPr>
+            <a:r>
+              <a:rPr lang="en-US" sz="2300" b="1" dirty="0">
+                <a:solidFill>
+                  <a:srgbClr val="FFFFFF"/>
+                </a:solidFill>
+                <a:latin typeface="Arial" pitchFamily="34" charset="0"/>
+                <a:ea typeface="Arial" pitchFamily="34" charset="-122"/>
+                <a:cs typeface="Arial" pitchFamily="34" charset="-120"/>
+              </a:rPr>
+              <a:t>En DIA — iconos de la paleta UML (II)</a:t>
+            </a:r>
+            <a:endParaRPr lang="en-US" sz="2300" dirty="0"/>
+          </a:p>
+        </p:txBody>
+      </p:sp>
+      <p:sp>
+        <p:nvSpPr>
+          <p:cNvPr id="4" name="Shape 2"/>
+          <p:cNvSpPr/>
+          <p:nvPr/>
+        </p:nvSpPr>
+        <p:spPr>
+          <a:xfrm>
+            <a:off x="1371600" y="1554480"/>
+            <a:ext cx="3566160" cy="3520440"/>
+          </a:xfrm>
+          <a:prstGeom prst="rect">
+            <a:avLst/>
+          </a:prstGeom>
+          <a:ln w="12700">
+            <a:solidFill>
+              <a:srgbClr val="EEEEEE"/>
+            </a:solidFill>
+            <a:prstDash val="solid"/>
+          </a:ln>
+        </p:spPr>
+        <p:txBody>
+          <a:bodyPr/>
+          <a:lstStyle/>
+          <a:p>
+            <a:endParaRPr lang="es-ES"/>
+          </a:p>
+        </p:txBody>
+      </p:sp>
+      <p:pic>
+        <p:nvPicPr>
+          <p:cNvPr id="5" name="Image 0" descr="C:/Users/Aitor/Documents/apuntes-profe/entornos-de-desarrollo/docs/tema6/img/actividad-transicion-icono.png"/>
+          <p:cNvPicPr>
+            <a:picLocks noChangeAspect="1"/>
+          </p:cNvPicPr>
+          <p:nvPr/>
+        </p:nvPicPr>
+        <p:blipFill>
+          <a:blip r:embed="rId3"/>
+          <a:stretch>
+            <a:fillRect/>
+          </a:stretch>
+        </p:blipFill>
+        <p:spPr>
+          <a:xfrm>
+            <a:off x="1371600" y="1554480"/>
+            <a:ext cx="3566160" cy="3520440"/>
+          </a:xfrm>
+          <a:prstGeom prst="rect">
+            <a:avLst/>
+          </a:prstGeom>
+        </p:spPr>
+      </p:pic>
+      <p:sp>
+        <p:nvSpPr>
+          <p:cNvPr id="6" name="Text 3"/>
+          <p:cNvSpPr/>
+          <p:nvPr/>
+        </p:nvSpPr>
+        <p:spPr>
+          <a:xfrm>
+            <a:off x="1097280" y="5102352"/>
+            <a:ext cx="4114800" cy="320040"/>
+          </a:xfrm>
+          <a:prstGeom prst="rect">
+            <a:avLst/>
+          </a:prstGeom>
+          <a:noFill/>
+          <a:ln/>
+        </p:spPr>
+        <p:txBody>
+          <a:bodyPr wrap="square" rtlCol="0" anchor="t"/>
+          <a:lstStyle/>
+          <a:p>
+            <a:pPr marL="0" indent="0" algn="ctr">
+              <a:buNone/>
+            </a:pPr>
+            <a:r>
+              <a:rPr lang="en-US" sz="1400" i="1" dirty="0">
+                <a:solidFill>
+                  <a:srgbClr val="757575"/>
+                </a:solidFill>
+                <a:latin typeface="Arial" pitchFamily="34" charset="0"/>
+                <a:ea typeface="Arial" pitchFamily="34" charset="-122"/>
+                <a:cs typeface="Arial" pitchFamily="34" charset="-120"/>
+              </a:rPr>
+              <a:t>Herramienta de transición (flecha) para conectar elementos</a:t>
+            </a:r>
+            <a:endParaRPr lang="en-US" sz="1400" dirty="0"/>
+          </a:p>
+        </p:txBody>
+      </p:sp>
+      <p:sp>
+        <p:nvSpPr>
+          <p:cNvPr id="7" name="Shape 4"/>
+          <p:cNvSpPr/>
+          <p:nvPr/>
+        </p:nvSpPr>
+        <p:spPr>
+          <a:xfrm>
+            <a:off x="6126480" y="1737360"/>
+            <a:ext cx="4023360" cy="2999232"/>
+          </a:xfrm>
+          <a:prstGeom prst="rect">
+            <a:avLst/>
+          </a:prstGeom>
+          <a:ln w="12700">
+            <a:solidFill>
+              <a:srgbClr val="EEEEEE"/>
+            </a:solidFill>
+            <a:prstDash val="solid"/>
+          </a:ln>
+        </p:spPr>
+        <p:txBody>
+          <a:bodyPr/>
+          <a:lstStyle/>
+          <a:p>
+            <a:endParaRPr lang="es-ES"/>
+          </a:p>
+        </p:txBody>
+      </p:sp>
+      <p:pic>
+        <p:nvPicPr>
+          <p:cNvPr id="8" name="Image 1" descr="C:/Users/Aitor/Documents/apuntes-profe/entornos-de-desarrollo/docs/tema6/img/actividad-barra-sincronizacion.png"/>
+          <p:cNvPicPr>
+            <a:picLocks noChangeAspect="1"/>
+          </p:cNvPicPr>
+          <p:nvPr/>
+        </p:nvPicPr>
+        <p:blipFill>
+          <a:blip r:embed="rId4"/>
+          <a:stretch>
+            <a:fillRect/>
+          </a:stretch>
+        </p:blipFill>
+        <p:spPr>
+          <a:xfrm>
+            <a:off x="6126480" y="1737360"/>
+            <a:ext cx="4023360" cy="2999232"/>
+          </a:xfrm>
+          <a:prstGeom prst="rect">
+            <a:avLst/>
+          </a:prstGeom>
+        </p:spPr>
+      </p:pic>
+      <p:sp>
+        <p:nvSpPr>
+          <p:cNvPr id="9" name="Text 5"/>
+          <p:cNvSpPr/>
+          <p:nvPr/>
+        </p:nvSpPr>
+        <p:spPr>
+          <a:xfrm>
+            <a:off x="5852160" y="4764024"/>
+            <a:ext cx="4572000" cy="320040"/>
+          </a:xfrm>
+          <a:prstGeom prst="rect">
+            <a:avLst/>
+          </a:prstGeom>
+          <a:noFill/>
+          <a:ln/>
+        </p:spPr>
+        <p:txBody>
+          <a:bodyPr wrap="square" rtlCol="0" anchor="t"/>
+          <a:lstStyle/>
+          <a:p>
+            <a:pPr marL="0" indent="0" algn="ctr">
+              <a:buNone/>
+            </a:pPr>
+            <a:r>
+              <a:rPr lang="en-US" sz="1400" i="1" dirty="0">
+                <a:solidFill>
+                  <a:srgbClr val="757575"/>
+                </a:solidFill>
+                <a:latin typeface="Arial" pitchFamily="34" charset="0"/>
+                <a:ea typeface="Arial" pitchFamily="34" charset="-122"/>
+                <a:cs typeface="Arial" pitchFamily="34" charset="-120"/>
+              </a:rPr>
+              <a:t>Barra de sincronización (fork/join) en DIA</a:t>
+            </a:r>
+            <a:endParaRPr lang="en-US" sz="1400" dirty="0"/>
+          </a:p>
+        </p:txBody>
+      </p:sp>
+      <p:sp>
+        <p:nvSpPr>
+          <p:cNvPr id="10" name="Text 6"/>
+          <p:cNvSpPr/>
+          <p:nvPr/>
+        </p:nvSpPr>
+        <p:spPr>
+          <a:xfrm>
+            <a:off x="548640" y="6473952"/>
+            <a:ext cx="11091672" cy="292608"/>
+          </a:xfrm>
+          <a:prstGeom prst="rect">
+            <a:avLst/>
+          </a:prstGeom>
+          <a:noFill/>
+          <a:ln/>
+        </p:spPr>
+        <p:txBody>
+          <a:bodyPr wrap="square" rtlCol="0" anchor="ctr"/>
+          <a:lstStyle/>
+          <a:p>
+            <a:pPr marL="0" indent="0" algn="r">
+              <a:buNone/>
+            </a:pPr>
+            <a:r>
+              <a:rPr lang="en-US" sz="1100" dirty="0">
+                <a:solidFill>
+                  <a:srgbClr val="757575"/>
+                </a:solidFill>
+                <a:latin typeface="Arial" pitchFamily="34" charset="0"/>
+                <a:ea typeface="Arial" pitchFamily="34" charset="-122"/>
+                <a:cs typeface="Arial" pitchFamily="34" charset="-120"/>
+              </a:rPr>
+              <a:t>Entornos de Desarrollo — Tema 6 · Diagrama de actividades</a:t>
+            </a:r>
+            <a:endParaRPr lang="en-US" sz="1100" dirty="0"/>
+          </a:p>
+        </p:txBody>
+      </p:sp>
+    </p:spTree>
+  </p:cSld>
+  <p:clrMapOvr>
+    <a:masterClrMapping/>
+  </p:clrMapOvr>
+</p:sld>
+</file>
+
+<file path=ppt/slides/slide8.xml><?xml version="1.0" encoding="utf-8"?>
+<p:sld xmlns:a="http://schemas.openxmlformats.org/drawingml/2006/main" xmlns:r="http://schemas.openxmlformats.org/officeDocument/2006/relationships" xmlns:p="http://schemas.openxmlformats.org/presentationml/2006/main">
+  <p:cSld name="Slide 8">
+    <p:spTree>
+      <p:nvGrpSpPr>
+        <p:cNvPr id="1" name=""/>
+        <p:cNvGrpSpPr/>
+        <p:nvPr/>
+      </p:nvGrpSpPr>
+      <p:grpSpPr>
+        <a:xfrm>
+          <a:off x="0" y="0"/>
+          <a:ext cx="0" cy="0"/>
+          <a:chOff x="0" y="0"/>
+          <a:chExt cx="0" cy="0"/>
+        </a:xfrm>
+      </p:grpSpPr>
+      <p:sp>
+        <p:nvSpPr>
+          <p:cNvPr id="2" name="Shape 0"/>
+          <p:cNvSpPr/>
+          <p:nvPr/>
+        </p:nvSpPr>
+        <p:spPr>
+          <a:xfrm>
+            <a:off x="0" y="0"/>
+            <a:ext cx="12188952" cy="777240"/>
+          </a:xfrm>
+          <a:prstGeom prst="rect">
+            <a:avLst/>
+          </a:prstGeom>
+          <a:solidFill>
+            <a:srgbClr val="303F9F"/>
+          </a:solidFill>
+          <a:ln w="12700">
+            <a:solidFill>
+              <a:srgbClr val="303F9F"/>
+            </a:solidFill>
+            <a:prstDash val="solid"/>
+          </a:ln>
+        </p:spPr>
+        <p:txBody>
+          <a:bodyPr/>
+          <a:lstStyle/>
+          <a:p>
+            <a:endParaRPr lang="es-ES"/>
+          </a:p>
+        </p:txBody>
+      </p:sp>
+      <p:sp>
+        <p:nvSpPr>
+          <p:cNvPr id="3" name="Text 1"/>
+          <p:cNvSpPr/>
+          <p:nvPr/>
+        </p:nvSpPr>
+        <p:spPr>
+          <a:xfrm>
+            <a:off x="365760" y="0"/>
+            <a:ext cx="11457432" cy="777240"/>
+          </a:xfrm>
+          <a:prstGeom prst="rect">
+            <a:avLst/>
+          </a:prstGeom>
+          <a:noFill/>
+          <a:ln/>
+        </p:spPr>
+        <p:txBody>
+          <a:bodyPr wrap="square" rtlCol="0" anchor="ctr"/>
+          <a:lstStyle/>
+          <a:p>
+            <a:pPr marL="0" indent="0">
+              <a:buNone/>
+            </a:pPr>
+            <a:r>
+              <a:rPr lang="en-US" sz="2300" b="1" dirty="0">
+                <a:solidFill>
+                  <a:srgbClr val="FFFFFF"/>
+                </a:solidFill>
+                <a:latin typeface="Arial" pitchFamily="34" charset="0"/>
+                <a:ea typeface="Arial" pitchFamily="34" charset="-122"/>
+                <a:cs typeface="Arial" pitchFamily="34" charset="-120"/>
+              </a:rPr>
+              <a:t>En DIA — nodo final</a:t>
+            </a:r>
+            <a:endParaRPr lang="en-US" sz="2300" dirty="0"/>
+          </a:p>
+        </p:txBody>
+      </p:sp>
+      <p:sp>
+        <p:nvSpPr>
+          <p:cNvPr id="4" name="Text 2"/>
+          <p:cNvSpPr/>
+          <p:nvPr/>
+        </p:nvSpPr>
+        <p:spPr>
+          <a:xfrm>
+            <a:off x="548640" y="1188720"/>
+            <a:ext cx="5394960" cy="1554480"/>
+          </a:xfrm>
+          <a:prstGeom prst="rect">
+            <a:avLst/>
+          </a:prstGeom>
+          <a:noFill/>
+          <a:ln/>
+        </p:spPr>
+        <p:txBody>
+          <a:bodyPr wrap="square" rtlCol="0" anchor="t"/>
+          <a:lstStyle/>
+          <a:p>
+            <a:pPr marL="0" indent="0">
+              <a:spcAft>
+                <a:spcPts val="800"/>
+              </a:spcAft>
+              <a:buNone/>
+            </a:pPr>
+            <a:r>
+              <a:rPr lang="en-US" sz="1700" dirty="0">
+                <a:solidFill>
+                  <a:srgbClr val="212121"/>
+                </a:solidFill>
+                <a:latin typeface="Arial" pitchFamily="34" charset="0"/>
+                <a:ea typeface="Arial" pitchFamily="34" charset="-122"/>
+                <a:cs typeface="Arial" pitchFamily="34" charset="-120"/>
+              </a:rPr>
+              <a:t>•  El nodo de fin se crea con el mismo icono que el de inicio.</a:t>
+            </a:r>
+            <a:endParaRPr lang="en-US" sz="1700" dirty="0"/>
+          </a:p>
+          <a:p>
+            <a:pPr marL="0" indent="0">
+              <a:spcAft>
+                <a:spcPts val="800"/>
+              </a:spcAft>
+              <a:buNone/>
+            </a:pPr>
+            <a:r>
+              <a:rPr lang="en-US" sz="1700" dirty="0">
+                <a:solidFill>
+                  <a:srgbClr val="212121"/>
+                </a:solidFill>
+                <a:latin typeface="Arial" pitchFamily="34" charset="0"/>
+                <a:ea typeface="Arial" pitchFamily="34" charset="-122"/>
+                <a:cs typeface="Arial" pitchFamily="34" charset="-120"/>
+              </a:rPr>
+              <a:t>•  Para convertirlo en final: doble clic sobre él → campo "Es final" → Sí.</a:t>
+            </a:r>
+            <a:endParaRPr lang="en-US" sz="1700" dirty="0"/>
+          </a:p>
+        </p:txBody>
+      </p:sp>
+      <p:sp>
+        <p:nvSpPr>
+          <p:cNvPr id="5" name="Shape 3"/>
+          <p:cNvSpPr/>
+          <p:nvPr/>
+        </p:nvSpPr>
+        <p:spPr>
+          <a:xfrm>
+            <a:off x="6492240" y="1188720"/>
+            <a:ext cx="4572000" cy="3127248"/>
+          </a:xfrm>
+          <a:prstGeom prst="rect">
+            <a:avLst/>
+          </a:prstGeom>
+          <a:ln w="12700">
+            <a:solidFill>
+              <a:srgbClr val="EEEEEE"/>
+            </a:solidFill>
+            <a:prstDash val="solid"/>
+          </a:ln>
+        </p:spPr>
+        <p:txBody>
+          <a:bodyPr/>
+          <a:lstStyle/>
+          <a:p>
+            <a:endParaRPr lang="es-ES"/>
+          </a:p>
+        </p:txBody>
+      </p:sp>
+      <p:pic>
+        <p:nvPicPr>
+          <p:cNvPr id="6" name="Image 0" descr="C:/Users/Aitor/Documents/apuntes-profe/entornos-de-desarrollo/docs/tema6/img/actividad-fin-propiedades.png"/>
+          <p:cNvPicPr>
+            <a:picLocks noChangeAspect="1"/>
+          </p:cNvPicPr>
+          <p:nvPr/>
+        </p:nvPicPr>
+        <p:blipFill>
+          <a:blip r:embed="rId3"/>
+          <a:stretch>
+            <a:fillRect/>
+          </a:stretch>
+        </p:blipFill>
+        <p:spPr>
+          <a:xfrm>
+            <a:off x="6492240" y="1188720"/>
+            <a:ext cx="4572000" cy="3127248"/>
+          </a:xfrm>
+          <a:prstGeom prst="rect">
+            <a:avLst/>
+          </a:prstGeom>
+        </p:spPr>
+      </p:pic>
+      <p:sp>
+        <p:nvSpPr>
+          <p:cNvPr id="7" name="Text 4"/>
+          <p:cNvSpPr/>
+          <p:nvPr/>
+        </p:nvSpPr>
+        <p:spPr>
+          <a:xfrm>
+            <a:off x="6217920" y="4343400"/>
+            <a:ext cx="5120640" cy="320040"/>
+          </a:xfrm>
+          <a:prstGeom prst="rect">
+            <a:avLst/>
+          </a:prstGeom>
+          <a:noFill/>
+          <a:ln/>
+        </p:spPr>
+        <p:txBody>
+          <a:bodyPr wrap="square" rtlCol="0" anchor="t"/>
+          <a:lstStyle/>
+          <a:p>
+            <a:pPr marL="0" indent="0" algn="ctr">
+              <a:buNone/>
+            </a:pPr>
+            <a:r>
+              <a:rPr lang="en-US" sz="1400" i="1" dirty="0">
+                <a:solidFill>
+                  <a:srgbClr val="757575"/>
+                </a:solidFill>
+                <a:latin typeface="Arial" pitchFamily="34" charset="0"/>
+                <a:ea typeface="Arial" pitchFamily="34" charset="-122"/>
+                <a:cs typeface="Arial" pitchFamily="34" charset="-120"/>
+              </a:rPr>
+              <a:t>Propiedades del nodo de estado final en DIA: activar "Es final: Sí"</a:t>
+            </a:r>
+            <a:endParaRPr lang="en-US" sz="1400" dirty="0"/>
+          </a:p>
+        </p:txBody>
+      </p:sp>
+      <p:sp>
+        <p:nvSpPr>
+          <p:cNvPr id="8" name="Text 5"/>
+          <p:cNvSpPr/>
+          <p:nvPr/>
+        </p:nvSpPr>
+        <p:spPr>
+          <a:xfrm>
+            <a:off x="548640" y="6473952"/>
+            <a:ext cx="11091672" cy="292608"/>
+          </a:xfrm>
+          <a:prstGeom prst="rect">
+            <a:avLst/>
+          </a:prstGeom>
+          <a:noFill/>
+          <a:ln/>
+        </p:spPr>
+        <p:txBody>
+          <a:bodyPr wrap="square" rtlCol="0" anchor="ctr"/>
+          <a:lstStyle/>
+          <a:p>
+            <a:pPr marL="0" indent="0" algn="r">
+              <a:buNone/>
+            </a:pPr>
+            <a:r>
+              <a:rPr lang="en-US" sz="1100" dirty="0">
+                <a:solidFill>
+                  <a:srgbClr val="757575"/>
+                </a:solidFill>
+                <a:latin typeface="Arial" pitchFamily="34" charset="0"/>
+                <a:ea typeface="Arial" pitchFamily="34" charset="-122"/>
+                <a:cs typeface="Arial" pitchFamily="34" charset="-120"/>
+              </a:rPr>
+              <a:t>Entornos de Desarrollo — Tema 6 · Diagrama de actividades</a:t>
+            </a:r>
+            <a:endParaRPr lang="en-US" sz="1100" dirty="0"/>
+          </a:p>
+        </p:txBody>
+      </p:sp>
+    </p:spTree>
+  </p:cSld>
+  <p:clrMapOvr>
+    <a:masterClrMapping/>
+  </p:clrMapOvr>
+</p:sld>
+</file>
+
+<file path=ppt/slides/slide9.xml><?xml version="1.0" encoding="utf-8"?>
+<p:sld xmlns:a="http://schemas.openxmlformats.org/drawingml/2006/main" xmlns:r="http://schemas.openxmlformats.org/officeDocument/2006/relationships" xmlns:p="http://schemas.openxmlformats.org/presentationml/2006/main">
+  <p:cSld name="Slide 9">
+    <p:spTree>
+      <p:nvGrpSpPr>
+        <p:cNvPr id="1" name=""/>
+        <p:cNvGrpSpPr/>
+        <p:nvPr/>
+      </p:nvGrpSpPr>
+      <p:grpSpPr>
+        <a:xfrm>
+          <a:off x="0" y="0"/>
+          <a:ext cx="0" cy="0"/>
+          <a:chOff x="0" y="0"/>
+          <a:chExt cx="0" cy="0"/>
+        </a:xfrm>
+      </p:grpSpPr>
+      <p:sp>
+        <p:nvSpPr>
+          <p:cNvPr id="2" name="Shape 0"/>
+          <p:cNvSpPr/>
+          <p:nvPr/>
+        </p:nvSpPr>
+        <p:spPr>
+          <a:xfrm>
+            <a:off x="0" y="0"/>
+            <a:ext cx="12188952" cy="777240"/>
+          </a:xfrm>
+          <a:prstGeom prst="rect">
+            <a:avLst/>
+          </a:prstGeom>
+          <a:solidFill>
+            <a:srgbClr val="303F9F"/>
+          </a:solidFill>
+          <a:ln w="12700">
+            <a:solidFill>
+              <a:srgbClr val="303F9F"/>
+            </a:solidFill>
+            <a:prstDash val="solid"/>
+          </a:ln>
+        </p:spPr>
+        <p:txBody>
+          <a:bodyPr/>
+          <a:lstStyle/>
+          <a:p>
+            <a:endParaRPr lang="es-ES"/>
+          </a:p>
+        </p:txBody>
+      </p:sp>
+      <p:sp>
+        <p:nvSpPr>
+          <p:cNvPr id="3" name="Text 1"/>
+          <p:cNvSpPr/>
+          <p:nvPr/>
+        </p:nvSpPr>
+        <p:spPr>
+          <a:xfrm>
+            <a:off x="365760" y="0"/>
+            <a:ext cx="11457432" cy="777240"/>
+          </a:xfrm>
+          <a:prstGeom prst="rect">
+            <a:avLst/>
+          </a:prstGeom>
+          <a:noFill/>
+          <a:ln/>
+        </p:spPr>
+        <p:txBody>
+          <a:bodyPr wrap="square" rtlCol="0" anchor="ctr"/>
+          <a:lstStyle/>
+          <a:p>
+            <a:pPr marL="0" indent="0">
+              <a:buNone/>
+            </a:pPr>
+            <a:r>
+              <a:rPr lang="en-US" sz="2300" b="1" dirty="0">
+                <a:solidFill>
+                  <a:srgbClr val="FFFFFF"/>
+                </a:solidFill>
+                <a:latin typeface="Arial" pitchFamily="34" charset="0"/>
+                <a:ea typeface="Arial" pitchFamily="34" charset="-122"/>
+                <a:cs typeface="Arial" pitchFamily="34" charset="-120"/>
+              </a:rPr>
+              <a:t>Resumen visual</a:t>
+            </a:r>
+            <a:endParaRPr lang="en-US" sz="2300" dirty="0"/>
+          </a:p>
+        </p:txBody>
+      </p:sp>
+      <p:graphicFrame>
+        <p:nvGraphicFramePr>
+          <p:cNvPr id="10" name="Table 0"/>
+          <p:cNvGraphicFramePr>
+            <a:graphicFrameLocks noGrp="1"/>
+          </p:cNvGraphicFramePr>
+          <p:nvPr>
+            <p:extLst>
+              <p:ext uri="{D42A27DB-BD31-4B8C-83A1-F6EECF244321}">
+                <p14:modId xmlns:p14="http://schemas.microsoft.com/office/powerpoint/2010/main" val="1579011935"/>
+              </p:ext>
+            </p:extLst>
+          </p:nvPr>
+        </p:nvGraphicFramePr>
+        <p:xfrm>
+          <a:off x="548640" y="1280160"/>
+          <a:ext cx="11091672" cy="4608576"/>
+        </p:xfrm>
+        <a:graphic>
+          <a:graphicData uri="http://schemas.openxmlformats.org/drawingml/2006/table">
+            <a:tbl>
+              <a:tblPr/>
+              <a:tblGrid>
+                <a:gridCol w="3882085">
+                  <a:extLst>
+                    <a:ext uri="{9D8B030D-6E8A-4147-A177-3AD203B41FA5}">
+                      <a16:colId xmlns:a16="http://schemas.microsoft.com/office/drawing/2014/main" val="20000"/>
+                    </a:ext>
+                  </a:extLst>
+                </a:gridCol>
+                <a:gridCol w="7209587">
+                  <a:extLst>
+                    <a:ext uri="{9D8B030D-6E8A-4147-A177-3AD203B41FA5}">
+                      <a16:colId xmlns:a16="http://schemas.microsoft.com/office/drawing/2014/main" val="20001"/>
+                    </a:ext>
+                  </a:extLst>
+                </a:gridCol>
+              </a:tblGrid>
+              <a:tr h="658368">
+                <a:tc>
+                  <a:txBody>
+                    <a:bodyPr/>
+                    <a:lstStyle/>
+                    <a:p>
+                      <a:pPr marL="0" indent="0" algn="ctr">
+                        <a:buNone/>
+                      </a:pPr>
+                      <a:r>
+                        <a:rPr lang="en-US" sz="1600" b="1" dirty="0">
+                          <a:solidFill>
+                            <a:srgbClr val="FFFFFF"/>
+                          </a:solidFill>
+                          <a:latin typeface="Arial" pitchFamily="34" charset="0"/>
+                          <a:ea typeface="Arial" pitchFamily="34" charset="-122"/>
+                          <a:cs typeface="Arial" pitchFamily="34" charset="-120"/>
+                        </a:rPr>
+                        <a:t>Elemento</a:t>
+                      </a:r>
+                      <a:endParaRPr lang="en-US" sz="1600" dirty="0">
+                        <a:latin typeface="Arial" charset="0"/>
+                        <a:ea typeface="Arial" charset="0"/>
+                        <a:cs typeface="Arial" charset="0"/>
+                      </a:endParaRPr>
+                    </a:p>
+                  </a:txBody>
+                  <a:tcPr marL="54864" marR="54864" marT="54864" marB="54864" anchor="ctr">
+                    <a:lnL w="12700" cap="flat" cmpd="sng" algn="ctr">
+                      <a:solidFill>
+                        <a:srgbClr val="EEEEEE"/>
+                      </a:solidFill>
+                      <a:prstDash val="solid"/>
+                      <a:round/>
+                      <a:headEnd type="none" w="med" len="med"/>
+                      <a:tailEnd type="none" w="med" len="med"/>
+                    </a:lnL>
+                    <a:lnR w="12700" cap="flat" cmpd="sng" algn="ctr">
+                      <a:solidFill>
+                        <a:srgbClr val="EEEEEE"/>
+                      </a:solidFill>
+                      <a:prstDash val="solid"/>
+                      <a:round/>
+                      <a:headEnd type="none" w="med" len="med"/>
+                      <a:tailEnd type="none" w="med" len="med"/>
+                    </a:lnR>
+                    <a:lnT w="12700" cap="flat" cmpd="sng" algn="ctr">
+                      <a:solidFill>
+                        <a:srgbClr val="EEEEEE"/>
+                      </a:solidFill>
+                      <a:prstDash val="solid"/>
+                      <a:round/>
+                      <a:headEnd type="none" w="med" len="med"/>
+                      <a:tailEnd type="none" w="med" len="med"/>
+                    </a:lnT>
+                    <a:lnB w="12700" cap="flat" cmpd="sng" algn="ctr">
+                      <a:solidFill>
+                        <a:srgbClr val="EEEEEE"/>
+                      </a:solidFill>
+                      <a:prstDash val="solid"/>
+                      <a:round/>
+                      <a:headEnd type="none" w="med" len="med"/>
+                      <a:tailEnd type="none" w="med" len="med"/>
+                    </a:lnB>
+                    <a:solidFill>
+                      <a:srgbClr val="3F51B5"/>
+                    </a:solidFill>
+                  </a:tcPr>
+                </a:tc>
+                <a:tc>
+                  <a:txBody>
+                    <a:bodyPr/>
+                    <a:lstStyle/>
+                    <a:p>
+                      <a:pPr marL="0" indent="0" algn="ctr">
+                        <a:buNone/>
+                      </a:pPr>
+                      <a:r>
+                        <a:rPr lang="en-US" sz="1600" b="1" dirty="0">
+                          <a:solidFill>
+                            <a:srgbClr val="FFFFFF"/>
+                          </a:solidFill>
+                          <a:latin typeface="Arial" pitchFamily="34" charset="0"/>
+                          <a:ea typeface="Arial" pitchFamily="34" charset="-122"/>
+                          <a:cs typeface="Arial" pitchFamily="34" charset="-120"/>
+                        </a:rPr>
+                        <a:t>Forma</a:t>
+                      </a:r>
+                      <a:endParaRPr lang="en-US" sz="1600" dirty="0">
+                        <a:latin typeface="Arial" charset="0"/>
+                        <a:ea typeface="Arial" charset="0"/>
+                        <a:cs typeface="Arial" charset="0"/>
+                      </a:endParaRPr>
+                    </a:p>
+                  </a:txBody>
+                  <a:tcPr marL="54864" marR="54864" marT="54864" marB="54864" anchor="ctr">
+                    <a:lnL w="12700" cap="flat" cmpd="sng" algn="ctr">
+                      <a:solidFill>
+                        <a:srgbClr val="EEEEEE"/>
+                      </a:solidFill>
+                      <a:prstDash val="solid"/>
+                      <a:round/>
+                      <a:headEnd type="none" w="med" len="med"/>
+                      <a:tailEnd type="none" w="med" len="med"/>
+                    </a:lnL>
+                    <a:lnR w="12700" cap="flat" cmpd="sng" algn="ctr">
+                      <a:solidFill>
+                        <a:srgbClr val="EEEEEE"/>
+                      </a:solidFill>
+                      <a:prstDash val="solid"/>
+                      <a:round/>
+                      <a:headEnd type="none" w="med" len="med"/>
+                      <a:tailEnd type="none" w="med" len="med"/>
+                    </a:lnR>
+                    <a:lnT w="12700" cap="flat" cmpd="sng" algn="ctr">
+                      <a:solidFill>
+                        <a:srgbClr val="EEEEEE"/>
+                      </a:solidFill>
+                      <a:prstDash val="solid"/>
+                      <a:round/>
+                      <a:headEnd type="none" w="med" len="med"/>
+                      <a:tailEnd type="none" w="med" len="med"/>
+                    </a:lnT>
+                    <a:lnB w="12700" cap="flat" cmpd="sng" algn="ctr">
+                      <a:solidFill>
+                        <a:srgbClr val="EEEEEE"/>
+                      </a:solidFill>
+                      <a:prstDash val="solid"/>
+                      <a:round/>
+                      <a:headEnd type="none" w="med" len="med"/>
+                      <a:tailEnd type="none" w="med" len="med"/>
+                    </a:lnB>
+                    <a:solidFill>
+                      <a:srgbClr val="3F51B5"/>
+                    </a:solidFill>
+                  </a:tcPr>
+                </a:tc>
+                <a:extLst>
+                  <a:ext uri="{0D108BD9-81ED-4DB2-BD59-A6C34878D82A}">
+                    <a16:rowId xmlns:a16="http://schemas.microsoft.com/office/drawing/2014/main" val="10000"/>
+                  </a:ext>
+                </a:extLst>
+              </a:tr>
+              <a:tr h="658368">
+                <a:tc>
+                  <a:txBody>
+                    <a:bodyPr/>
+                    <a:lstStyle/>
+                    <a:p>
+                      <a:pPr marL="0" indent="0" algn="l">
+                        <a:buNone/>
+                      </a:pPr>
+                      <a:r>
+                        <a:rPr lang="en-US" sz="1600" dirty="0">
+                          <a:solidFill>
+                            <a:srgbClr val="212121"/>
+                          </a:solidFill>
+                          <a:latin typeface="Arial" pitchFamily="34" charset="0"/>
+                          <a:ea typeface="Arial" pitchFamily="34" charset="-122"/>
+                          <a:cs typeface="Arial" pitchFamily="34" charset="-120"/>
+                        </a:rPr>
+                        <a:t>Inicio</a:t>
+                      </a:r>
+                      <a:endParaRPr lang="en-US" sz="1600" dirty="0">
+                        <a:latin typeface="Arial" charset="0"/>
+                        <a:ea typeface="Arial" charset="0"/>
+                        <a:cs typeface="Arial" charset="0"/>
+                      </a:endParaRPr>
+                    </a:p>
+                  </a:txBody>
+                  <a:tcPr marL="54864" marR="54864" marT="54864" marB="54864" anchor="ctr">
+                    <a:lnL w="12700" cap="flat" cmpd="sng" algn="ctr">
+                      <a:solidFill>
+                        <a:srgbClr val="EEEEEE"/>
+                      </a:solidFill>
+                      <a:prstDash val="solid"/>
+                      <a:round/>
+                      <a:headEnd type="none" w="med" len="med"/>
+                      <a:tailEnd type="none" w="med" len="med"/>
+                    </a:lnL>
+                    <a:lnR w="12700" cap="flat" cmpd="sng" algn="ctr">
+                      <a:solidFill>
+                        <a:srgbClr val="EEEEEE"/>
+                      </a:solidFill>
+                      <a:prstDash val="solid"/>
+                      <a:round/>
+                      <a:headEnd type="none" w="med" len="med"/>
+                      <a:tailEnd type="none" w="med" len="med"/>
+                    </a:lnR>
+                    <a:lnT w="12700" cap="flat" cmpd="sng" algn="ctr">
+                      <a:solidFill>
+                        <a:srgbClr val="EEEEEE"/>
+                      </a:solidFill>
+                      <a:prstDash val="solid"/>
+                      <a:round/>
+                      <a:headEnd type="none" w="med" len="med"/>
+                      <a:tailEnd type="none" w="med" len="med"/>
+                    </a:lnT>
+                    <a:lnB w="12700" cap="flat" cmpd="sng" algn="ctr">
+                      <a:solidFill>
+                        <a:srgbClr val="EEEEEE"/>
+                      </a:solidFill>
+                      <a:prstDash val="solid"/>
+                      <a:round/>
+                      <a:headEnd type="none" w="med" len="med"/>
+                      <a:tailEnd type="none" w="med" len="med"/>
+                    </a:lnB>
+                    <a:solidFill>
+                      <a:srgbClr val="FFFFFF"/>
+                    </a:solidFill>
+                  </a:tcPr>
+                </a:tc>
+                <a:tc>
+                  <a:txBody>
+                    <a:bodyPr/>
+                    <a:lstStyle/>
+                    <a:p>
+                      <a:pPr marL="0" indent="0" algn="l">
+                        <a:buNone/>
+                      </a:pPr>
+                      <a:r>
+                        <a:rPr lang="en-US" sz="1600" dirty="0">
+                          <a:solidFill>
+                            <a:srgbClr val="212121"/>
+                          </a:solidFill>
+                          <a:latin typeface="Arial" pitchFamily="34" charset="0"/>
+                          <a:ea typeface="Arial" pitchFamily="34" charset="-122"/>
+                          <a:cs typeface="Arial" pitchFamily="34" charset="-120"/>
+                        </a:rPr>
+                        <a:t>● (círculo negro)</a:t>
+                      </a:r>
+                      <a:endParaRPr lang="en-US" sz="1600" dirty="0">
+                        <a:latin typeface="Arial" charset="0"/>
+                        <a:ea typeface="Arial" charset="0"/>
+                        <a:cs typeface="Arial" charset="0"/>
+                      </a:endParaRPr>
+                    </a:p>
+                  </a:txBody>
+                  <a:tcPr marL="54864" marR="54864" marT="54864" marB="54864" anchor="ctr">
+                    <a:lnL w="12700" cap="flat" cmpd="sng" algn="ctr">
+                      <a:solidFill>
+                        <a:srgbClr val="EEEEEE"/>
+                      </a:solidFill>
+                      <a:prstDash val="solid"/>
+                      <a:round/>
+                      <a:headEnd type="none" w="med" len="med"/>
+                      <a:tailEnd type="none" w="med" len="med"/>
+                    </a:lnL>
+                    <a:lnR w="12700" cap="flat" cmpd="sng" algn="ctr">
+                      <a:solidFill>
+                        <a:srgbClr val="EEEEEE"/>
+                      </a:solidFill>
+                      <a:prstDash val="solid"/>
+                      <a:round/>
+                      <a:headEnd type="none" w="med" len="med"/>
+                      <a:tailEnd type="none" w="med" len="med"/>
+                    </a:lnR>
+                    <a:lnT w="12700" cap="flat" cmpd="sng" algn="ctr">
+                      <a:solidFill>
+                        <a:srgbClr val="EEEEEE"/>
+                      </a:solidFill>
+                      <a:prstDash val="solid"/>
+                      <a:round/>
+                      <a:headEnd type="none" w="med" len="med"/>
+                      <a:tailEnd type="none" w="med" len="med"/>
+                    </a:lnT>
+                    <a:lnB w="12700" cap="flat" cmpd="sng" algn="ctr">
+                      <a:solidFill>
+                        <a:srgbClr val="EEEEEE"/>
+                      </a:solidFill>
+                      <a:prstDash val="solid"/>
+                      <a:round/>
+                      <a:headEnd type="none" w="med" len="med"/>
+                      <a:tailEnd type="none" w="med" len="med"/>
+                    </a:lnB>
+                    <a:solidFill>
+                      <a:srgbClr val="FFFFFF"/>
+                    </a:solidFill>
+                  </a:tcPr>
+                </a:tc>
+                <a:extLst>
+                  <a:ext uri="{0D108BD9-81ED-4DB2-BD59-A6C34878D82A}">
+                    <a16:rowId xmlns:a16="http://schemas.microsoft.com/office/drawing/2014/main" val="10001"/>
+                  </a:ext>
+                </a:extLst>
+              </a:tr>
+              <a:tr h="658368">
+                <a:tc>
+                  <a:txBody>
+                    <a:bodyPr/>
+                    <a:lstStyle/>
+                    <a:p>
+                      <a:pPr marL="0" indent="0" algn="l">
+                        <a:buNone/>
+                      </a:pPr>
+                      <a:r>
+                        <a:rPr lang="en-US" sz="1600" dirty="0">
+                          <a:solidFill>
+                            <a:srgbClr val="212121"/>
+                          </a:solidFill>
+                          <a:latin typeface="Arial" pitchFamily="34" charset="0"/>
+                          <a:ea typeface="Arial" pitchFamily="34" charset="-122"/>
+                          <a:cs typeface="Arial" pitchFamily="34" charset="-120"/>
+                        </a:rPr>
+                        <a:t>Actividad</a:t>
+                      </a:r>
+                      <a:endParaRPr lang="en-US" sz="1600" dirty="0">
+                        <a:latin typeface="Arial" charset="0"/>
+                        <a:ea typeface="Arial" charset="0"/>
+                        <a:cs typeface="Arial" charset="0"/>
+                      </a:endParaRPr>
+                    </a:p>
+                  </a:txBody>
+                  <a:tcPr marL="54864" marR="54864" marT="54864" marB="54864" anchor="ctr">
+                    <a:lnL w="12700" cap="flat" cmpd="sng" algn="ctr">
+                      <a:solidFill>
+                        <a:srgbClr val="EEEEEE"/>
+                      </a:solidFill>
+                      <a:prstDash val="solid"/>
+                      <a:round/>
+                      <a:headEnd type="none" w="med" len="med"/>
+                      <a:tailEnd type="none" w="med" len="med"/>
+                    </a:lnL>
+                    <a:lnR w="12700" cap="flat" cmpd="sng" algn="ctr">
+                      <a:solidFill>
+                        <a:srgbClr val="EEEEEE"/>
+                      </a:solidFill>
+                      <a:prstDash val="solid"/>
+                      <a:round/>
+                      <a:headEnd type="none" w="med" len="med"/>
+                      <a:tailEnd type="none" w="med" len="med"/>
+                    </a:lnR>
+                    <a:lnT w="12700" cap="flat" cmpd="sng" algn="ctr">
+                      <a:solidFill>
+                        <a:srgbClr val="EEEEEE"/>
+                      </a:solidFill>
+                      <a:prstDash val="solid"/>
+                      <a:round/>
+                      <a:headEnd type="none" w="med" len="med"/>
+                      <a:tailEnd type="none" w="med" len="med"/>
+                    </a:lnT>
+                    <a:lnB w="12700" cap="flat" cmpd="sng" algn="ctr">
+                      <a:solidFill>
+                        <a:srgbClr val="EEEEEE"/>
+                      </a:solidFill>
+                      <a:prstDash val="solid"/>
+                      <a:round/>
+                      <a:headEnd type="none" w="med" len="med"/>
+                      <a:tailEnd type="none" w="med" len="med"/>
+                    </a:lnB>
+                    <a:solidFill>
+                      <a:srgbClr val="F5F5F5"/>
+                    </a:solidFill>
+                  </a:tcPr>
+                </a:tc>
+                <a:tc>
+                  <a:txBody>
+                    <a:bodyPr/>
+                    <a:lstStyle/>
+                    <a:p>
+                      <a:pPr marL="0" indent="0" algn="l">
+                        <a:buNone/>
+                      </a:pPr>
+                      <a:r>
+                        <a:rPr lang="en-US" sz="1600" dirty="0">
+                          <a:solidFill>
+                            <a:srgbClr val="212121"/>
+                          </a:solidFill>
+                          <a:latin typeface="Arial" pitchFamily="34" charset="0"/>
+                          <a:ea typeface="Arial" pitchFamily="34" charset="-122"/>
+                          <a:cs typeface="Arial" pitchFamily="34" charset="-120"/>
+                        </a:rPr>
+                        <a:t>Rectángulo redondeado</a:t>
+                      </a:r>
+                      <a:endParaRPr lang="en-US" sz="1600" dirty="0">
+                        <a:latin typeface="Arial" charset="0"/>
+                        <a:ea typeface="Arial" charset="0"/>
+                        <a:cs typeface="Arial" charset="0"/>
+                      </a:endParaRPr>
+                    </a:p>
+                  </a:txBody>
+                  <a:tcPr marL="54864" marR="54864" marT="54864" marB="54864" anchor="ctr">
+                    <a:lnL w="12700" cap="flat" cmpd="sng" algn="ctr">
+                      <a:solidFill>
+                        <a:srgbClr val="EEEEEE"/>
+                      </a:solidFill>
+                      <a:prstDash val="solid"/>
+                      <a:round/>
+                      <a:headEnd type="none" w="med" len="med"/>
+                      <a:tailEnd type="none" w="med" len="med"/>
+                    </a:lnL>
+                    <a:lnR w="12700" cap="flat" cmpd="sng" algn="ctr">
+                      <a:solidFill>
+                        <a:srgbClr val="EEEEEE"/>
+                      </a:solidFill>
+                      <a:prstDash val="solid"/>
+                      <a:round/>
+                      <a:headEnd type="none" w="med" len="med"/>
+                      <a:tailEnd type="none" w="med" len="med"/>
+                    </a:lnR>
+                    <a:lnT w="12700" cap="flat" cmpd="sng" algn="ctr">
+                      <a:solidFill>
+                        <a:srgbClr val="EEEEEE"/>
+                      </a:solidFill>
+                      <a:prstDash val="solid"/>
+                      <a:round/>
+                      <a:headEnd type="none" w="med" len="med"/>
+                      <a:tailEnd type="none" w="med" len="med"/>
+                    </a:lnT>
+                    <a:lnB w="12700" cap="flat" cmpd="sng" algn="ctr">
+                      <a:solidFill>
+                        <a:srgbClr val="EEEEEE"/>
+                      </a:solidFill>
+                      <a:prstDash val="solid"/>
+                      <a:round/>
+                      <a:headEnd type="none" w="med" len="med"/>
+                      <a:tailEnd type="none" w="med" len="med"/>
+                    </a:lnB>
+                    <a:solidFill>
+                      <a:srgbClr val="F5F5F5"/>
+                    </a:solidFill>
+                  </a:tcPr>
+                </a:tc>
+                <a:extLst>
+                  <a:ext uri="{0D108BD9-81ED-4DB2-BD59-A6C34878D82A}">
+                    <a16:rowId xmlns:a16="http://schemas.microsoft.com/office/drawing/2014/main" val="10002"/>
+                  </a:ext>
+                </a:extLst>
+              </a:tr>
+              <a:tr h="658368">
+                <a:tc>
+                  <a:txBody>
+                    <a:bodyPr/>
+                    <a:lstStyle/>
+                    <a:p>
+                      <a:pPr marL="0" indent="0" algn="l">
+                        <a:buNone/>
+                      </a:pPr>
+                      <a:r>
+                        <a:rPr lang="en-US" sz="1600" dirty="0">
+                          <a:solidFill>
+                            <a:srgbClr val="212121"/>
+                          </a:solidFill>
+                          <a:latin typeface="Arial" pitchFamily="34" charset="0"/>
+                          <a:ea typeface="Arial" pitchFamily="34" charset="-122"/>
+                          <a:cs typeface="Arial" pitchFamily="34" charset="-120"/>
+                        </a:rPr>
+                        <a:t>Decisión</a:t>
+                      </a:r>
+                      <a:endParaRPr lang="en-US" sz="1600" dirty="0">
+                        <a:latin typeface="Arial" charset="0"/>
+                        <a:ea typeface="Arial" charset="0"/>
+                        <a:cs typeface="Arial" charset="0"/>
+                      </a:endParaRPr>
+                    </a:p>
+                  </a:txBody>
+                  <a:tcPr marL="54864" marR="54864" marT="54864" marB="54864" anchor="ctr">
+                    <a:lnL w="12700" cap="flat" cmpd="sng" algn="ctr">
+                      <a:solidFill>
+                        <a:srgbClr val="EEEEEE"/>
+                      </a:solidFill>
+                      <a:prstDash val="solid"/>
+                      <a:round/>
+                      <a:headEnd type="none" w="med" len="med"/>
+                      <a:tailEnd type="none" w="med" len="med"/>
+                    </a:lnL>
+                    <a:lnR w="12700" cap="flat" cmpd="sng" algn="ctr">
+                      <a:solidFill>
+                        <a:srgbClr val="EEEEEE"/>
+                      </a:solidFill>
+                      <a:prstDash val="solid"/>
+                      <a:round/>
+                      <a:headEnd type="none" w="med" len="med"/>
+                      <a:tailEnd type="none" w="med" len="med"/>
+                    </a:lnR>
+                    <a:lnT w="12700" cap="flat" cmpd="sng" algn="ctr">
+                      <a:solidFill>
+                        <a:srgbClr val="EEEEEE"/>
+                      </a:solidFill>
+                      <a:prstDash val="solid"/>
+                      <a:round/>
+                      <a:headEnd type="none" w="med" len="med"/>
+                      <a:tailEnd type="none" w="med" len="med"/>
+                    </a:lnT>
+                    <a:lnB w="12700" cap="flat" cmpd="sng" algn="ctr">
+                      <a:solidFill>
+                        <a:srgbClr val="EEEEEE"/>
+                      </a:solidFill>
+                      <a:prstDash val="solid"/>
+                      <a:round/>
+                      <a:headEnd type="none" w="med" len="med"/>
+                      <a:tailEnd type="none" w="med" len="med"/>
+                    </a:lnB>
+                    <a:solidFill>
+                      <a:srgbClr val="FFFFFF"/>
+                    </a:solidFill>
+                  </a:tcPr>
+                </a:tc>
+                <a:tc>
+                  <a:txBody>
+                    <a:bodyPr/>
+                    <a:lstStyle/>
+                    <a:p>
+                      <a:pPr marL="0" indent="0" algn="l">
+                        <a:buNone/>
+                      </a:pPr>
+                      <a:r>
+                        <a:rPr lang="en-US" sz="1600" dirty="0">
+                          <a:solidFill>
+                            <a:srgbClr val="212121"/>
+                          </a:solidFill>
+                          <a:latin typeface="Arial" pitchFamily="34" charset="0"/>
+                          <a:ea typeface="Arial" pitchFamily="34" charset="-122"/>
+                          <a:cs typeface="Arial" pitchFamily="34" charset="-120"/>
+                        </a:rPr>
+                        <a:t>◇ (rombo)</a:t>
+                      </a:r>
+                      <a:endParaRPr lang="en-US" sz="1600" dirty="0">
+                        <a:latin typeface="Arial" charset="0"/>
+                        <a:ea typeface="Arial" charset="0"/>
+                        <a:cs typeface="Arial" charset="0"/>
+                      </a:endParaRPr>
+                    </a:p>
+                  </a:txBody>
+                  <a:tcPr marL="54864" marR="54864" marT="54864" marB="54864" anchor="ctr">
+                    <a:lnL w="12700" cap="flat" cmpd="sng" algn="ctr">
+                      <a:solidFill>
+                        <a:srgbClr val="EEEEEE"/>
+                      </a:solidFill>
+                      <a:prstDash val="solid"/>
+                      <a:round/>
+                      <a:headEnd type="none" w="med" len="med"/>
+                      <a:tailEnd type="none" w="med" len="med"/>
+                    </a:lnL>
+                    <a:lnR w="12700" cap="flat" cmpd="sng" algn="ctr">
+                      <a:solidFill>
+                        <a:srgbClr val="EEEEEE"/>
+                      </a:solidFill>
+                      <a:prstDash val="solid"/>
+                      <a:round/>
+                      <a:headEnd type="none" w="med" len="med"/>
+                      <a:tailEnd type="none" w="med" len="med"/>
+                    </a:lnR>
+                    <a:lnT w="12700" cap="flat" cmpd="sng" algn="ctr">
+                      <a:solidFill>
+                        <a:srgbClr val="EEEEEE"/>
+                      </a:solidFill>
+                      <a:prstDash val="solid"/>
+                      <a:round/>
+                      <a:headEnd type="none" w="med" len="med"/>
+                      <a:tailEnd type="none" w="med" len="med"/>
+                    </a:lnT>
+                    <a:lnB w="12700" cap="flat" cmpd="sng" algn="ctr">
+                      <a:solidFill>
+                        <a:srgbClr val="EEEEEE"/>
+                      </a:solidFill>
+                      <a:prstDash val="solid"/>
+                      <a:round/>
+                      <a:headEnd type="none" w="med" len="med"/>
+                      <a:tailEnd type="none" w="med" len="med"/>
+                    </a:lnB>
+                    <a:solidFill>
+                      <a:srgbClr val="FFFFFF"/>
+                    </a:solidFill>
+                  </a:tcPr>
+                </a:tc>
+                <a:extLst>
+                  <a:ext uri="{0D108BD9-81ED-4DB2-BD59-A6C34878D82A}">
+                    <a16:rowId xmlns:a16="http://schemas.microsoft.com/office/drawing/2014/main" val="10003"/>
+                  </a:ext>
+                </a:extLst>
+              </a:tr>
+              <a:tr h="658368">
+                <a:tc>
+                  <a:txBody>
+                    <a:bodyPr/>
+                    <a:lstStyle/>
+                    <a:p>
+                      <a:pPr marL="0" indent="0" algn="l">
+                        <a:buNone/>
+                      </a:pPr>
+                      <a:r>
+                        <a:rPr lang="en-US" sz="1600" dirty="0">
+                          <a:solidFill>
+                            <a:srgbClr val="212121"/>
+                          </a:solidFill>
+                          <a:latin typeface="Arial" pitchFamily="34" charset="0"/>
+                          <a:ea typeface="Arial" pitchFamily="34" charset="-122"/>
+                          <a:cs typeface="Arial" pitchFamily="34" charset="-120"/>
+                        </a:rPr>
+                        <a:t>Flujo</a:t>
+                      </a:r>
+                      <a:endParaRPr lang="en-US" sz="1600" dirty="0">
+                        <a:latin typeface="Arial" charset="0"/>
+                        <a:ea typeface="Arial" charset="0"/>
+                        <a:cs typeface="Arial" charset="0"/>
+                      </a:endParaRPr>
+                    </a:p>
+                  </a:txBody>
+                  <a:tcPr marL="54864" marR="54864" marT="54864" marB="54864" anchor="ctr">
+                    <a:lnL w="12700" cap="flat" cmpd="sng" algn="ctr">
+                      <a:solidFill>
+                        <a:srgbClr val="EEEEEE"/>
+                      </a:solidFill>
+                      <a:prstDash val="solid"/>
+                      <a:round/>
+                      <a:headEnd type="none" w="med" len="med"/>
+                      <a:tailEnd type="none" w="med" len="med"/>
+                    </a:lnL>
+                    <a:lnR w="12700" cap="flat" cmpd="sng" algn="ctr">
+                      <a:solidFill>
+                        <a:srgbClr val="EEEEEE"/>
+                      </a:solidFill>
+                      <a:prstDash val="solid"/>
+                      <a:round/>
+                      <a:headEnd type="none" w="med" len="med"/>
+                      <a:tailEnd type="none" w="med" len="med"/>
+                    </a:lnR>
+                    <a:lnT w="12700" cap="flat" cmpd="sng" algn="ctr">
+                      <a:solidFill>
+                        <a:srgbClr val="EEEEEE"/>
+                      </a:solidFill>
+                      <a:prstDash val="solid"/>
+                      <a:round/>
+                      <a:headEnd type="none" w="med" len="med"/>
+                      <a:tailEnd type="none" w="med" len="med"/>
+                    </a:lnT>
+                    <a:lnB w="12700" cap="flat" cmpd="sng" algn="ctr">
+                      <a:solidFill>
+                        <a:srgbClr val="EEEEEE"/>
+                      </a:solidFill>
+                      <a:prstDash val="solid"/>
+                      <a:round/>
+                      <a:headEnd type="none" w="med" len="med"/>
+                      <a:tailEnd type="none" w="med" len="med"/>
+                    </a:lnB>
+                    <a:solidFill>
+                      <a:srgbClr val="F5F5F5"/>
+                    </a:solidFill>
+                  </a:tcPr>
+                </a:tc>
+                <a:tc>
+                  <a:txBody>
+                    <a:bodyPr/>
+                    <a:lstStyle/>
+                    <a:p>
+                      <a:pPr marL="0" indent="0" algn="l">
+                        <a:buNone/>
+                      </a:pPr>
+                      <a:r>
+                        <a:rPr lang="en-US" sz="1600" dirty="0">
+                          <a:solidFill>
+                            <a:srgbClr val="212121"/>
+                          </a:solidFill>
+                          <a:latin typeface="Arial" pitchFamily="34" charset="0"/>
+                          <a:ea typeface="Arial" pitchFamily="34" charset="-122"/>
+                          <a:cs typeface="Arial" pitchFamily="34" charset="-120"/>
+                        </a:rPr>
+                        <a:t>→ (flecha)</a:t>
+                      </a:r>
+                      <a:endParaRPr lang="en-US" sz="1600" dirty="0">
+                        <a:latin typeface="Arial" charset="0"/>
+                        <a:ea typeface="Arial" charset="0"/>
+                        <a:cs typeface="Arial" charset="0"/>
+                      </a:endParaRPr>
+                    </a:p>
+                  </a:txBody>
+                  <a:tcPr marL="54864" marR="54864" marT="54864" marB="54864" anchor="ctr">
+                    <a:lnL w="12700" cap="flat" cmpd="sng" algn="ctr">
+                      <a:solidFill>
+                        <a:srgbClr val="EEEEEE"/>
+                      </a:solidFill>
+                      <a:prstDash val="solid"/>
+                      <a:round/>
+                      <a:headEnd type="none" w="med" len="med"/>
+                      <a:tailEnd type="none" w="med" len="med"/>
+                    </a:lnL>
+                    <a:lnR w="12700" cap="flat" cmpd="sng" algn="ctr">
+                      <a:solidFill>
+                        <a:srgbClr val="EEEEEE"/>
+                      </a:solidFill>
+                      <a:prstDash val="solid"/>
+                      <a:round/>
+                      <a:headEnd type="none" w="med" len="med"/>
+                      <a:tailEnd type="none" w="med" len="med"/>
+                    </a:lnR>
+                    <a:lnT w="12700" cap="flat" cmpd="sng" algn="ctr">
+                      <a:solidFill>
+                        <a:srgbClr val="EEEEEE"/>
+                      </a:solidFill>
+                      <a:prstDash val="solid"/>
+                      <a:round/>
+                      <a:headEnd type="none" w="med" len="med"/>
+                      <a:tailEnd type="none" w="med" len="med"/>
+                    </a:lnT>
+                    <a:lnB w="12700" cap="flat" cmpd="sng" algn="ctr">
+                      <a:solidFill>
+                        <a:srgbClr val="EEEEEE"/>
+                      </a:solidFill>
+                      <a:prstDash val="solid"/>
+                      <a:round/>
+                      <a:headEnd type="none" w="med" len="med"/>
+                      <a:tailEnd type="none" w="med" len="med"/>
+                    </a:lnB>
+                    <a:solidFill>
+                      <a:srgbClr val="F5F5F5"/>
+                    </a:solidFill>
+                  </a:tcPr>
+                </a:tc>
+                <a:extLst>
+                  <a:ext uri="{0D108BD9-81ED-4DB2-BD59-A6C34878D82A}">
+                    <a16:rowId xmlns:a16="http://schemas.microsoft.com/office/drawing/2014/main" val="10004"/>
+                  </a:ext>
+                </a:extLst>
+              </a:tr>
+              <a:tr h="658368">
+                <a:tc>
+                  <a:txBody>
+                    <a:bodyPr/>
+                    <a:lstStyle/>
+                    <a:p>
+                      <a:pPr marL="0" indent="0" algn="l">
+                        <a:buNone/>
+                      </a:pPr>
+                      <a:r>
+                        <a:rPr lang="en-US" sz="1600" dirty="0">
+                          <a:solidFill>
+                            <a:srgbClr val="212121"/>
+                          </a:solidFill>
+                          <a:latin typeface="Arial" pitchFamily="34" charset="0"/>
+                          <a:ea typeface="Arial" pitchFamily="34" charset="-122"/>
+                          <a:cs typeface="Arial" pitchFamily="34" charset="-120"/>
+                        </a:rPr>
+                        <a:t>Concurrencia</a:t>
+                      </a:r>
+                      <a:endParaRPr lang="en-US" sz="1600" dirty="0">
+                        <a:latin typeface="Arial" charset="0"/>
+                        <a:ea typeface="Arial" charset="0"/>
+                        <a:cs typeface="Arial" charset="0"/>
+                      </a:endParaRPr>
+                    </a:p>
+                  </a:txBody>
+                  <a:tcPr marL="54864" marR="54864" marT="54864" marB="54864" anchor="ctr">
+                    <a:lnL w="12700" cap="flat" cmpd="sng" algn="ctr">
+                      <a:solidFill>
+                        <a:srgbClr val="EEEEEE"/>
+                      </a:solidFill>
+                      <a:prstDash val="solid"/>
+                      <a:round/>
+                      <a:headEnd type="none" w="med" len="med"/>
+                      <a:tailEnd type="none" w="med" len="med"/>
+                    </a:lnL>
+                    <a:lnR w="12700" cap="flat" cmpd="sng" algn="ctr">
+                      <a:solidFill>
+                        <a:srgbClr val="EEEEEE"/>
+                      </a:solidFill>
+                      <a:prstDash val="solid"/>
+                      <a:round/>
+                      <a:headEnd type="none" w="med" len="med"/>
+                      <a:tailEnd type="none" w="med" len="med"/>
+                    </a:lnR>
+                    <a:lnT w="12700" cap="flat" cmpd="sng" algn="ctr">
+                      <a:solidFill>
+                        <a:srgbClr val="EEEEEE"/>
+                      </a:solidFill>
+                      <a:prstDash val="solid"/>
+                      <a:round/>
+                      <a:headEnd type="none" w="med" len="med"/>
+                      <a:tailEnd type="none" w="med" len="med"/>
+                    </a:lnT>
+                    <a:lnB w="12700" cap="flat" cmpd="sng" algn="ctr">
+                      <a:solidFill>
+                        <a:srgbClr val="EEEEEE"/>
+                      </a:solidFill>
+                      <a:prstDash val="solid"/>
+                      <a:round/>
+                      <a:headEnd type="none" w="med" len="med"/>
+                      <a:tailEnd type="none" w="med" len="med"/>
+                    </a:lnB>
+                    <a:solidFill>
+                      <a:srgbClr val="FFFFFF"/>
+                    </a:solidFill>
+                  </a:tcPr>
+                </a:tc>
+                <a:tc>
+                  <a:txBody>
+                    <a:bodyPr/>
+                    <a:lstStyle/>
+                    <a:p>
+                      <a:pPr marL="0" indent="0" algn="l">
+                        <a:buNone/>
+                      </a:pPr>
+                      <a:r>
+                        <a:rPr lang="en-US" sz="1600" dirty="0">
+                          <a:solidFill>
+                            <a:srgbClr val="212121"/>
+                          </a:solidFill>
+                          <a:latin typeface="Arial" pitchFamily="34" charset="0"/>
+                          <a:ea typeface="Arial" pitchFamily="34" charset="-122"/>
+                          <a:cs typeface="Arial" pitchFamily="34" charset="-120"/>
+                        </a:rPr>
+                        <a:t>═══ (barra gruesa horizontal)</a:t>
+                      </a:r>
+                      <a:endParaRPr lang="en-US" sz="1600" dirty="0">
+                        <a:latin typeface="Arial" charset="0"/>
+                        <a:ea typeface="Arial" charset="0"/>
+                        <a:cs typeface="Arial" charset="0"/>
+                      </a:endParaRPr>
+                    </a:p>
+                  </a:txBody>
+                  <a:tcPr marL="54864" marR="54864" marT="54864" marB="54864" anchor="ctr">
+                    <a:lnL w="12700" cap="flat" cmpd="sng" algn="ctr">
+                      <a:solidFill>
+                        <a:srgbClr val="EEEEEE"/>
+                      </a:solidFill>
+                      <a:prstDash val="solid"/>
+                      <a:round/>
+                      <a:headEnd type="none" w="med" len="med"/>
+                      <a:tailEnd type="none" w="med" len="med"/>
+                    </a:lnL>
+                    <a:lnR w="12700" cap="flat" cmpd="sng" algn="ctr">
+                      <a:solidFill>
+                        <a:srgbClr val="EEEEEE"/>
+                      </a:solidFill>
+                      <a:prstDash val="solid"/>
+                      <a:round/>
+                      <a:headEnd type="none" w="med" len="med"/>
+                      <a:tailEnd type="none" w="med" len="med"/>
+                    </a:lnR>
+                    <a:lnT w="12700" cap="flat" cmpd="sng" algn="ctr">
+                      <a:solidFill>
+                        <a:srgbClr val="EEEEEE"/>
+                      </a:solidFill>
+                      <a:prstDash val="solid"/>
+                      <a:round/>
+                      <a:headEnd type="none" w="med" len="med"/>
+                      <a:tailEnd type="none" w="med" len="med"/>
+                    </a:lnT>
+                    <a:lnB w="12700" cap="flat" cmpd="sng" algn="ctr">
+                      <a:solidFill>
+                        <a:srgbClr val="EEEEEE"/>
+                      </a:solidFill>
+                      <a:prstDash val="solid"/>
+                      <a:round/>
+                      <a:headEnd type="none" w="med" len="med"/>
+                      <a:tailEnd type="none" w="med" len="med"/>
+                    </a:lnB>
+                    <a:solidFill>
+                      <a:srgbClr val="FFFFFF"/>
+                    </a:solidFill>
+                  </a:tcPr>
+                </a:tc>
+                <a:extLst>
+                  <a:ext uri="{0D108BD9-81ED-4DB2-BD59-A6C34878D82A}">
+                    <a16:rowId xmlns:a16="http://schemas.microsoft.com/office/drawing/2014/main" val="10005"/>
+                  </a:ext>
+                </a:extLst>
+              </a:tr>
+              <a:tr h="658368">
+                <a:tc>
+                  <a:txBody>
+                    <a:bodyPr/>
+                    <a:lstStyle/>
+                    <a:p>
+                      <a:pPr marL="0" indent="0" algn="l">
+                        <a:buNone/>
+                      </a:pPr>
+                      <a:r>
+                        <a:rPr lang="en-US" sz="1600" dirty="0">
+                          <a:solidFill>
+                            <a:srgbClr val="212121"/>
+                          </a:solidFill>
+                          <a:latin typeface="Arial" pitchFamily="34" charset="0"/>
+                          <a:ea typeface="Arial" pitchFamily="34" charset="-122"/>
+                          <a:cs typeface="Arial" pitchFamily="34" charset="-120"/>
+                        </a:rPr>
+                        <a:t>Fin</a:t>
+                      </a:r>
+                      <a:endParaRPr lang="en-US" sz="1600" dirty="0">
+                        <a:latin typeface="Arial" charset="0"/>
+                        <a:ea typeface="Arial" charset="0"/>
+                        <a:cs typeface="Arial" charset="0"/>
+                      </a:endParaRPr>
+                    </a:p>
+                  </a:txBody>
+                  <a:tcPr marL="54864" marR="54864" marT="54864" marB="54864" anchor="ctr">
+                    <a:lnL w="12700" cap="flat" cmpd="sng" algn="ctr">
+                      <a:solidFill>
+                        <a:srgbClr val="EEEEEE"/>
+                      </a:solidFill>
+                      <a:prstDash val="solid"/>
+                      <a:round/>
+                      <a:headEnd type="none" w="med" len="med"/>
+                      <a:tailEnd type="none" w="med" len="med"/>
+                    </a:lnL>
+                    <a:lnR w="12700" cap="flat" cmpd="sng" algn="ctr">
+                      <a:solidFill>
+                        <a:srgbClr val="EEEEEE"/>
+                      </a:solidFill>
+                      <a:prstDash val="solid"/>
+                      <a:round/>
+                      <a:headEnd type="none" w="med" len="med"/>
+                      <a:tailEnd type="none" w="med" len="med"/>
+                    </a:lnR>
+                    <a:lnT w="12700" cap="flat" cmpd="sng" algn="ctr">
+                      <a:solidFill>
+                        <a:srgbClr val="EEEEEE"/>
+                      </a:solidFill>
+                      <a:prstDash val="solid"/>
+                      <a:round/>
+                      <a:headEnd type="none" w="med" len="med"/>
+                      <a:tailEnd type="none" w="med" len="med"/>
+                    </a:lnT>
+                    <a:lnB w="12700" cap="flat" cmpd="sng" algn="ctr">
+                      <a:solidFill>
+                        <a:srgbClr val="EEEEEE"/>
+                      </a:solidFill>
+                      <a:prstDash val="solid"/>
+                      <a:round/>
+                      <a:headEnd type="none" w="med" len="med"/>
+                      <a:tailEnd type="none" w="med" len="med"/>
+                    </a:lnB>
+                    <a:solidFill>
+                      <a:srgbClr val="F5F5F5"/>
+                    </a:solidFill>
+                  </a:tcPr>
+                </a:tc>
+                <a:tc>
+                  <a:txBody>
+                    <a:bodyPr/>
+                    <a:lstStyle/>
+                    <a:p>
+                      <a:pPr marL="0" indent="0" algn="l">
+                        <a:buNone/>
+                      </a:pPr>
+                      <a:r>
+                        <a:rPr lang="en-US" sz="1600" dirty="0">
+                          <a:solidFill>
+                            <a:srgbClr val="212121"/>
+                          </a:solidFill>
+                          <a:latin typeface="Arial" pitchFamily="34" charset="0"/>
+                          <a:ea typeface="Arial" pitchFamily="34" charset="-122"/>
+                          <a:cs typeface="Arial" pitchFamily="34" charset="-120"/>
+                        </a:rPr>
+                        <a:t>⊙ (círculo con borde)</a:t>
+                      </a:r>
+                      <a:endParaRPr lang="en-US" sz="1600" dirty="0">
+                        <a:latin typeface="Arial" charset="0"/>
+                        <a:ea typeface="Arial" charset="0"/>
+                        <a:cs typeface="Arial" charset="0"/>
+                      </a:endParaRPr>
+                    </a:p>
+                  </a:txBody>
+                  <a:tcPr marL="54864" marR="54864" marT="54864" marB="54864" anchor="ctr">
+                    <a:lnL w="12700" cap="flat" cmpd="sng" algn="ctr">
+                      <a:solidFill>
+                        <a:srgbClr val="EEEEEE"/>
+                      </a:solidFill>
+                      <a:prstDash val="solid"/>
+                      <a:round/>
+                      <a:headEnd type="none" w="med" len="med"/>
+                      <a:tailEnd type="none" w="med" len="med"/>
+                    </a:lnL>
+                    <a:lnR w="12700" cap="flat" cmpd="sng" algn="ctr">
+                      <a:solidFill>
+                        <a:srgbClr val="EEEEEE"/>
+                      </a:solidFill>
+                      <a:prstDash val="solid"/>
+                      <a:round/>
+                      <a:headEnd type="none" w="med" len="med"/>
+                      <a:tailEnd type="none" w="med" len="med"/>
+                    </a:lnR>
+                    <a:lnT w="12700" cap="flat" cmpd="sng" algn="ctr">
+                      <a:solidFill>
+                        <a:srgbClr val="EEEEEE"/>
+                      </a:solidFill>
+                      <a:prstDash val="solid"/>
+                      <a:round/>
+                      <a:headEnd type="none" w="med" len="med"/>
+                      <a:tailEnd type="none" w="med" len="med"/>
+                    </a:lnT>
+                    <a:lnB w="12700" cap="flat" cmpd="sng" algn="ctr">
+                      <a:solidFill>
+                        <a:srgbClr val="EEEEEE"/>
+                      </a:solidFill>
+                      <a:prstDash val="solid"/>
+                      <a:round/>
+                      <a:headEnd type="none" w="med" len="med"/>
+                      <a:tailEnd type="none" w="med" len="med"/>
+                    </a:lnB>
+                    <a:solidFill>
+                      <a:srgbClr val="F5F5F5"/>
+                    </a:solidFill>
+                  </a:tcPr>
+                </a:tc>
+                <a:extLst>
+                  <a:ext uri="{0D108BD9-81ED-4DB2-BD59-A6C34878D82A}">
+                    <a16:rowId xmlns:a16="http://schemas.microsoft.com/office/drawing/2014/main" val="10006"/>
+                  </a:ext>
+                </a:extLst>
+              </a:tr>
+            </a:tbl>
+          </a:graphicData>
+        </a:graphic>
+      </p:graphicFrame>
+      <p:sp>
+        <p:nvSpPr>
+          <p:cNvPr id="5" name="Text 2"/>
+          <p:cNvSpPr/>
+          <p:nvPr/>
+        </p:nvSpPr>
+        <p:spPr>
+          <a:xfrm>
+            <a:off x="548640" y="6473952"/>
+            <a:ext cx="11091672" cy="292608"/>
+          </a:xfrm>
+          <a:prstGeom prst="rect">
+            <a:avLst/>
+          </a:prstGeom>
+          <a:noFill/>
+          <a:ln/>
+        </p:spPr>
+        <p:txBody>
+          <a:bodyPr wrap="square" rtlCol="0" anchor="ctr"/>
+          <a:lstStyle/>
+          <a:p>
+            <a:pPr marL="0" indent="0" algn="r">
               <a:buNone/>
             </a:pPr>
             <a:r>
@@ -4253,4 +6812,319 @@
     </a:ext>
   </a:extLst>
 </a:theme>
+</file>
+
+<file path=ppt/theme/theme2.xml><?xml version="1.0" encoding="utf-8"?>
+<a:theme xmlns:a="http://schemas.openxmlformats.org/drawingml/2006/main" name="Tema de Office">
+  <a:themeElements>
+    <a:clrScheme name="Office">
+      <a:dk1>
+        <a:sysClr val="windowText" lastClr="000000"/>
+      </a:dk1>
+      <a:lt1>
+        <a:sysClr val="window" lastClr="FFFFFF"/>
+      </a:lt1>
+      <a:dk2>
+        <a:srgbClr val="0E2841"/>
+      </a:dk2>
+      <a:lt2>
+        <a:srgbClr val="E8E8E8"/>
+      </a:lt2>
+      <a:accent1>
+        <a:srgbClr val="156082"/>
+      </a:accent1>
+      <a:accent2>
+        <a:srgbClr val="E97132"/>
+      </a:accent2>
+      <a:accent3>
+        <a:srgbClr val="196B24"/>
+      </a:accent3>
+      <a:accent4>
+        <a:srgbClr val="0F9ED5"/>
+      </a:accent4>
+      <a:accent5>
+        <a:srgbClr val="A02B93"/>
+      </a:accent5>
+      <a:accent6>
+        <a:srgbClr val="4EA72E"/>
+      </a:accent6>
+      <a:hlink>
+        <a:srgbClr val="467886"/>
+      </a:hlink>
+      <a:folHlink>
+        <a:srgbClr val="96607D"/>
+      </a:folHlink>
+    </a:clrScheme>
+    <a:fontScheme name="Office">
+      <a:majorFont>
+        <a:latin typeface="Aptos Display" panose="02110004020202020204"/>
+        <a:ea typeface=""/>
+        <a:cs typeface=""/>
+        <a:font script="Jpan" typeface="游ゴシック Light"/>
+        <a:font script="Hang" typeface="맑은 고딕"/>
+        <a:font script="Hans" typeface="等线 Light"/>
+        <a:font script="Hant" typeface="新細明體"/>
+        <a:font script="Arab" typeface="Times New Roman"/>
+        <a:font script="Hebr" typeface="Times New Roman"/>
+        <a:font script="Thai" typeface="Angsana New"/>
+        <a:font script="Ethi" typeface="Nyala"/>
+        <a:font script="Beng" typeface="Vrinda"/>
+        <a:font script="Gujr" typeface="Shruti"/>
+        <a:font script="Khmr" typeface="MoolBoran"/>
+        <a:font script="Knda" typeface="Tunga"/>
+        <a:font script="Guru" typeface="Raavi"/>
+        <a:font script="Cans" typeface="Euphemia"/>
+        <a:font script="Cher" typeface="Plantagenet Cherokee"/>
+        <a:font script="Yiii" typeface="Microsoft Yi Baiti"/>
+        <a:font script="Tibt" typeface="Microsoft Himalaya"/>
+        <a:font script="Thaa" typeface="MV Boli"/>
+        <a:font script="Deva" typeface="Mangal"/>
+        <a:font script="Telu" typeface="Gautami"/>
+        <a:font script="Taml" typeface="Latha"/>
+        <a:font script="Syrc" typeface="Estrangelo Edessa"/>
+        <a:font script="Orya" typeface="Kalinga"/>
+        <a:font script="Mlym" typeface="Kartika"/>
+        <a:font script="Laoo" typeface="DokChampa"/>
+        <a:font script="Sinh" typeface="Iskoola Pota"/>
+        <a:font script="Mong" typeface="Mongolian Baiti"/>
+        <a:font script="Viet" typeface="Times New Roman"/>
+        <a:font script="Uigh" typeface="Microsoft Uighur"/>
+        <a:font script="Geor" typeface="Sylfaen"/>
+        <a:font script="Armn" typeface="Arial"/>
+        <a:font script="Bugi" typeface="Leelawadee UI"/>
+        <a:font script="Bopo" typeface="Microsoft JhengHei"/>
+        <a:font script="Java" typeface="Javanese Text"/>
+        <a:font script="Lisu" typeface="Segoe UI"/>
+        <a:font script="Mymr" typeface="Myanmar Text"/>
+        <a:font script="Nkoo" typeface="Ebrima"/>
+        <a:font script="Olck" typeface="Nirmala UI"/>
+        <a:font script="Osma" typeface="Ebrima"/>
+        <a:font script="Phag" typeface="Phagspa"/>
+        <a:font script="Syrn" typeface="Estrangelo Edessa"/>
+        <a:font script="Syrj" typeface="Estrangelo Edessa"/>
+        <a:font script="Syre" typeface="Estrangelo Edessa"/>
+        <a:font script="Sora" typeface="Nirmala UI"/>
+        <a:font script="Tale" typeface="Microsoft Tai Le"/>
+        <a:font script="Talu" typeface="Microsoft New Tai Lue"/>
+        <a:font script="Tfng" typeface="Ebrima"/>
+      </a:majorFont>
+      <a:minorFont>
+        <a:latin typeface="Aptos" panose="02110004020202020204"/>
+        <a:ea typeface=""/>
+        <a:cs typeface=""/>
+        <a:font script="Jpan" typeface="游ゴシック"/>
+        <a:font script="Hang" typeface="맑은 고딕"/>
+        <a:font script="Hans" typeface="等线"/>
+        <a:font script="Hant" typeface="新細明體"/>
+        <a:font script="Arab" typeface="Arial"/>
+        <a:font script="Hebr" typeface="Arial"/>
+        <a:font script="Thai" typeface="Cordia New"/>
+        <a:font script="Ethi" typeface="Nyala"/>
+        <a:font script="Beng" typeface="Vrinda"/>
+        <a:font script="Gujr" typeface="Shruti"/>
+        <a:font script="Khmr" typeface="DaunPenh"/>
+        <a:font script="Knda" typeface="Tunga"/>
+        <a:font script="Guru" typeface="Raavi"/>
+        <a:font script="Cans" typeface="Euphemia"/>
+        <a:font script="Cher" typeface="Plantagenet Cherokee"/>
+        <a:font script="Yiii" typeface="Microsoft Yi Baiti"/>
+        <a:font script="Tibt" typeface="Microsoft Himalaya"/>
+        <a:font script="Thaa" typeface="MV Boli"/>
+        <a:font script="Deva" typeface="Mangal"/>
+        <a:font script="Telu" typeface="Gautami"/>
+        <a:font script="Taml" typeface="Latha"/>
+        <a:font script="Syrc" typeface="Estrangelo Edessa"/>
+        <a:font script="Orya" typeface="Kalinga"/>
+        <a:font script="Mlym" typeface="Kartika"/>
+        <a:font script="Laoo" typeface="DokChampa"/>
+        <a:font script="Sinh" typeface="Iskoola Pota"/>
+        <a:font script="Mong" typeface="Mongolian Baiti"/>
+        <a:font script="Viet" typeface="Arial"/>
+        <a:font script="Uigh" typeface="Microsoft Uighur"/>
+        <a:font script="Geor" typeface="Sylfaen"/>
+        <a:font script="Armn" typeface="Arial"/>
+        <a:font script="Bugi" typeface="Leelawadee UI"/>
+        <a:font script="Bopo" typeface="Microsoft JhengHei"/>
+        <a:font script="Java" typeface="Javanese Text"/>
+        <a:font script="Lisu" typeface="Segoe UI"/>
+        <a:font script="Mymr" typeface="Myanmar Text"/>
+        <a:font script="Nkoo" typeface="Ebrima"/>
+        <a:font script="Olck" typeface="Nirmala UI"/>
+        <a:font script="Osma" typeface="Ebrima"/>
+        <a:font script="Phag" typeface="Phagspa"/>
+        <a:font script="Syrn" typeface="Estrangelo Edessa"/>
+        <a:font script="Syrj" typeface="Estrangelo Edessa"/>
+        <a:font script="Syre" typeface="Estrangelo Edessa"/>
+        <a:font script="Sora" typeface="Nirmala UI"/>
+        <a:font script="Tale" typeface="Microsoft Tai Le"/>
+        <a:font script="Talu" typeface="Microsoft New Tai Lue"/>
+        <a:font script="Tfng" typeface="Ebrima"/>
+      </a:minorFont>
+    </a:fontScheme>
+    <a:fmtScheme name="Office">
+      <a:fillStyleLst>
+        <a:solidFill>
+          <a:schemeClr val="phClr"/>
+        </a:solidFill>
+        <a:gradFill rotWithShape="1">
+          <a:gsLst>
+            <a:gs pos="0">
+              <a:schemeClr val="phClr">
+                <a:lumMod val="110000"/>
+                <a:satMod val="105000"/>
+                <a:tint val="67000"/>
+              </a:schemeClr>
+            </a:gs>
+            <a:gs pos="50000">
+              <a:schemeClr val="phClr">
+                <a:lumMod val="105000"/>
+                <a:satMod val="103000"/>
+                <a:tint val="73000"/>
+              </a:schemeClr>
+            </a:gs>
+            <a:gs pos="100000">
+              <a:schemeClr val="phClr">
+                <a:lumMod val="105000"/>
+                <a:satMod val="109000"/>
+                <a:tint val="81000"/>
+              </a:schemeClr>
+            </a:gs>
+          </a:gsLst>
+          <a:lin ang="5400000" scaled="0"/>
+        </a:gradFill>
+        <a:gradFill rotWithShape="1">
+          <a:gsLst>
+            <a:gs pos="0">
+              <a:schemeClr val="phClr">
+                <a:satMod val="103000"/>
+                <a:lumMod val="102000"/>
+                <a:tint val="94000"/>
+              </a:schemeClr>
+            </a:gs>
+            <a:gs pos="50000">
+              <a:schemeClr val="phClr">
+                <a:satMod val="110000"/>
+                <a:lumMod val="100000"/>
+                <a:shade val="100000"/>
+              </a:schemeClr>
+            </a:gs>
+            <a:gs pos="100000">
+              <a:schemeClr val="phClr">
+                <a:lumMod val="99000"/>
+                <a:satMod val="120000"/>
+                <a:shade val="78000"/>
+              </a:schemeClr>
+            </a:gs>
+          </a:gsLst>
+          <a:lin ang="5400000" scaled="0"/>
+        </a:gradFill>
+      </a:fillStyleLst>
+      <a:lnStyleLst>
+        <a:ln w="12700" cap="flat" cmpd="sng" algn="ctr">
+          <a:solidFill>
+            <a:schemeClr val="phClr"/>
+          </a:solidFill>
+          <a:prstDash val="solid"/>
+          <a:miter lim="800000"/>
+        </a:ln>
+        <a:ln w="19050" cap="flat" cmpd="sng" algn="ctr">
+          <a:solidFill>
+            <a:schemeClr val="phClr"/>
+          </a:solidFill>
+          <a:prstDash val="solid"/>
+          <a:miter lim="800000"/>
+        </a:ln>
+        <a:ln w="25400" cap="flat" cmpd="sng" algn="ctr">
+          <a:solidFill>
+            <a:schemeClr val="phClr"/>
+          </a:solidFill>
+          <a:prstDash val="solid"/>
+          <a:miter lim="800000"/>
+        </a:ln>
+      </a:lnStyleLst>
+      <a:effectStyleLst>
+        <a:effectStyle>
+          <a:effectLst/>
+        </a:effectStyle>
+        <a:effectStyle>
+          <a:effectLst/>
+        </a:effectStyle>
+        <a:effectStyle>
+          <a:effectLst>
+            <a:outerShdw blurRad="57150" dist="19050" dir="5400000" algn="ctr" rotWithShape="0">
+              <a:srgbClr val="000000">
+                <a:alpha val="63000"/>
+              </a:srgbClr>
+            </a:outerShdw>
+          </a:effectLst>
+        </a:effectStyle>
+      </a:effectStyleLst>
+      <a:bgFillStyleLst>
+        <a:solidFill>
+          <a:schemeClr val="phClr"/>
+        </a:solidFill>
+        <a:solidFill>
+          <a:schemeClr val="phClr">
+            <a:tint val="95000"/>
+            <a:satMod val="170000"/>
+          </a:schemeClr>
+        </a:solidFill>
+        <a:gradFill rotWithShape="1">
+          <a:gsLst>
+            <a:gs pos="0">
+              <a:schemeClr val="phClr">
+                <a:tint val="93000"/>
+                <a:satMod val="150000"/>
+                <a:shade val="98000"/>
+                <a:lumMod val="102000"/>
+              </a:schemeClr>
+            </a:gs>
+            <a:gs pos="50000">
+              <a:schemeClr val="phClr">
+                <a:tint val="98000"/>
+                <a:satMod val="130000"/>
+                <a:shade val="90000"/>
+                <a:lumMod val="103000"/>
+              </a:schemeClr>
+            </a:gs>
+            <a:gs pos="100000">
+              <a:schemeClr val="phClr">
+                <a:shade val="63000"/>
+                <a:satMod val="120000"/>
+              </a:schemeClr>
+            </a:gs>
+          </a:gsLst>
+          <a:lin ang="5400000" scaled="0"/>
+        </a:gradFill>
+      </a:bgFillStyleLst>
+    </a:fmtScheme>
+  </a:themeElements>
+  <a:objectDefaults>
+    <a:lnDef>
+      <a:spPr/>
+      <a:bodyPr/>
+      <a:lstStyle/>
+      <a:style>
+        <a:lnRef idx="2">
+          <a:schemeClr val="accent1"/>
+        </a:lnRef>
+        <a:fillRef idx="0">
+          <a:schemeClr val="accent1"/>
+        </a:fillRef>
+        <a:effectRef idx="1">
+          <a:schemeClr val="accent1"/>
+        </a:effectRef>
+        <a:fontRef idx="minor">
+          <a:schemeClr val="tx1"/>
+        </a:fontRef>
+      </a:style>
+    </a:lnDef>
+  </a:objectDefaults>
+  <a:extraClrSchemeLst/>
+  <a:extLst>
+    <a:ext uri="{05A4C25C-085E-4340-85A3-A5531E510DB2}">
+      <thm15:themeFamily xmlns:thm15="http://schemas.microsoft.com/office/thememl/2012/main" name="Office Theme" id="{2E142A2C-CD16-42D6-873A-C26D2A0506FA}" vid="{1BDDFF52-6CD6-40A5-AB3C-68EB2F1E4D0A}"/>
+    </a:ext>
+  </a:extLst>
+</a:theme>
 </file>